--- a/06_render/out/deck_peptides.pptx
+++ b/06_render/out/deck_peptides.pptx
@@ -4066,7 +4066,7 @@
                 </a:solidFill>
                 <a:latin typeface="Arimo"/>
               </a:rPr>
-              <a:t>Источники: fact_0051, fact_0055, SRC-A044, SRC-A048</a:t>
+              <a:t>Источники: fact_0051, fact_0056, SRC-A044, SRC-A049</a:t>
             </a:r>
           </a:p>
         </p:txBody>
@@ -4236,7 +4236,7 @@
                 </a:solidFill>
                 <a:latin typeface="Arimo"/>
               </a:rPr>
-              <a:t>• Пальмитоил трипептид-5 стимулирует синтез коллагена за счет активации фактора роста TGF-beta и защиты от металлопротеиназ.</a:t>
+              <a:t>• Пальмитоил трипептид-1 (pal-GHK) действует как вестник для стимуляции синтеза коллагена и гликозаминогликанов.</a:t>
             </a:r>
           </a:p>
           <a:p>

--- a/06_render/out/deck_peptides.pptx
+++ b/06_render/out/deck_peptides.pptx
@@ -3148,9 +3148,33 @@
           </a:p>
         </p:txBody>
       </p:sp>
-      <p:sp>
-        <p:nvSpPr>
-          <p:cNvPr id="3" name="TextBox 2"/>
+      <p:pic>
+        <p:nvPicPr>
+          <p:cNvPr id="3" name="Picture 2" descr="descriptor_2C3440.png"/>
+          <p:cNvPicPr>
+            <a:picLocks noChangeAspect="1"/>
+          </p:cNvPicPr>
+          <p:nvPr/>
+        </p:nvPicPr>
+        <p:blipFill>
+          <a:blip r:embed="rId2"/>
+          <a:stretch>
+            <a:fillRect/>
+          </a:stretch>
+        </p:blipFill>
+        <p:spPr>
+          <a:xfrm>
+            <a:off x="357187" y="3661171"/>
+            <a:ext cx="3107531" cy="776882"/>
+          </a:xfrm>
+          <a:prstGeom prst="rect">
+            <a:avLst/>
+          </a:prstGeom>
+        </p:spPr>
+      </p:pic>
+      <p:sp>
+        <p:nvSpPr>
+          <p:cNvPr id="4" name="TextBox 3"/>
           <p:cNvSpPr txBox="1"/>
           <p:nvPr/>
         </p:nvSpPr>
@@ -3195,7 +3219,7 @@
       </p:sp>
       <p:sp>
         <p:nvSpPr>
-          <p:cNvPr id="4" name="TextBox 3"/>
+          <p:cNvPr id="5" name="TextBox 4"/>
           <p:cNvSpPr txBox="1"/>
           <p:nvPr/>
         </p:nvSpPr>
@@ -3240,7 +3264,7 @@
       </p:sp>
       <p:sp>
         <p:nvSpPr>
-          <p:cNvPr id="5" name="TextBox 4"/>
+          <p:cNvPr id="6" name="TextBox 5"/>
           <p:cNvSpPr txBox="1"/>
           <p:nvPr/>
         </p:nvSpPr>
@@ -3285,7 +3309,7 @@
       </p:sp>
       <p:sp>
         <p:nvSpPr>
-          <p:cNvPr id="6" name="Rounded Rectangle 5"/>
+          <p:cNvPr id="7" name="Rounded Rectangle 6"/>
           <p:cNvSpPr/>
           <p:nvPr/>
         </p:nvSpPr>
@@ -3378,7 +3402,7 @@
         </p:nvSpPr>
         <p:spPr>
           <a:xfrm>
-            <a:off x="357187" y="4643437"/>
+            <a:off x="357187" y="4464843"/>
             <a:ext cx="4572000" cy="274320"/>
           </a:xfrm>
           <a:prstGeom prst="rect">
@@ -3423,7 +3447,7 @@
         </p:nvSpPr>
         <p:spPr>
           <a:xfrm>
-            <a:off x="5029200" y="4643437"/>
+            <a:off x="5029200" y="4464843"/>
             <a:ext cx="3749039" cy="274320"/>
           </a:xfrm>
           <a:prstGeom prst="rect">
@@ -3462,115 +3486,23 @@
       </p:sp>
       <p:sp>
         <p:nvSpPr>
-          <p:cNvPr id="4" name="TextBox 3"/>
-          <p:cNvSpPr txBox="1"/>
-          <p:nvPr/>
-        </p:nvSpPr>
-        <p:spPr>
-          <a:xfrm>
-            <a:off x="357187" y="357187"/>
-            <a:ext cx="8429625" cy="401835"/>
-          </a:xfrm>
-          <a:prstGeom prst="rect">
-            <a:avLst/>
-          </a:prstGeom>
-          <a:noFill/>
-        </p:spPr>
-        <p:txBody>
-          <a:bodyPr wrap="square" tIns="0" bIns="0" lIns="0" rIns="0">
-            <a:spAutoFit/>
-          </a:bodyPr>
-          <a:lstStyle/>
-          <a:p>
-            <a:pPr algn="l">
-              <a:lnSpc>
-                <a:spcPct val="120000"/>
-              </a:lnSpc>
-              <a:defRPr sz="2600" b="1" i="0">
-                <a:solidFill>
-                  <a:srgbClr val="2C3440"/>
-                </a:solidFill>
-                <a:latin typeface="Arimo"/>
-              </a:defRPr>
-            </a:pPr>
-            <a:r>
-              <a:rPr sz="2600" b="1" i="0">
-                <a:solidFill>
-                  <a:srgbClr val="2C3440"/>
-                </a:solidFill>
-                <a:latin typeface="Arimo"/>
-              </a:rPr>
-              <a:t>Классификация косметических пептидов</a:t>
-            </a:r>
-          </a:p>
-        </p:txBody>
-      </p:sp>
-      <p:sp>
-        <p:nvSpPr>
-          <p:cNvPr id="5" name="TextBox 4"/>
-          <p:cNvSpPr txBox="1"/>
-          <p:nvPr/>
-        </p:nvSpPr>
-        <p:spPr>
-          <a:xfrm>
-            <a:off x="357187" y="803671"/>
-            <a:ext cx="8429625" cy="267890"/>
-          </a:xfrm>
-          <a:prstGeom prst="rect">
-            <a:avLst/>
-          </a:prstGeom>
-          <a:noFill/>
-        </p:spPr>
-        <p:txBody>
-          <a:bodyPr wrap="square" tIns="0" bIns="0" lIns="0" rIns="0">
-            <a:spAutoFit/>
-          </a:bodyPr>
-          <a:lstStyle/>
-          <a:p>
-            <a:pPr algn="l">
-              <a:lnSpc>
-                <a:spcPct val="120000"/>
-              </a:lnSpc>
-              <a:defRPr sz="1500" b="0" i="0">
-                <a:solidFill>
-                  <a:srgbClr val="6D8470"/>
-                </a:solidFill>
-                <a:latin typeface="Arimo"/>
-              </a:defRPr>
-            </a:pPr>
-            <a:r>
-              <a:rPr sz="1500" b="0" i="0">
-                <a:solidFill>
-                  <a:srgbClr val="6D8470"/>
-                </a:solidFill>
-                <a:latin typeface="Arimo"/>
-              </a:rPr>
-              <a:t>Основные функциональные группы биомиметических пептидов в косметологии</a:t>
-            </a:r>
-          </a:p>
-        </p:txBody>
-      </p:sp>
-      <p:sp>
-        <p:nvSpPr>
-          <p:cNvPr id="6" name="Rounded Rectangle 5"/>
+          <p:cNvPr id="4" name="Rectangle 3"/>
           <p:cNvSpPr/>
           <p:nvPr/>
         </p:nvSpPr>
         <p:spPr>
           <a:xfrm>
-            <a:off x="357187" y="1339453"/>
-            <a:ext cx="2624328" cy="2834640"/>
-          </a:xfrm>
-          <a:prstGeom prst="roundRect">
+            <a:off x="357187" y="4732734"/>
+            <a:ext cx="8429625" cy="8929"/>
+          </a:xfrm>
+          <a:prstGeom prst="rect">
             <a:avLst/>
           </a:prstGeom>
           <a:solidFill>
-            <a:srgbClr val="E6D2CA"/>
+            <a:srgbClr val="D7E0CE"/>
           </a:solidFill>
-          <a:ln w="12700">
-            <a:solidFill>
-              <a:srgbClr val="D7E0CE"/>
-            </a:solidFill>
+          <a:ln>
+            <a:noFill/>
           </a:ln>
         </p:spPr>
         <p:style>
@@ -3595,16 +3527,40 @@
           </a:p>
         </p:txBody>
       </p:sp>
-      <p:sp>
-        <p:nvSpPr>
-          <p:cNvPr id="7" name="TextBox 6"/>
+      <p:pic>
+        <p:nvPicPr>
+          <p:cNvPr id="5" name="Picture 4" descr="mark_6D8470.png"/>
+          <p:cNvPicPr>
+            <a:picLocks noChangeAspect="1"/>
+          </p:cNvPicPr>
+          <p:nvPr/>
+        </p:nvPicPr>
+        <p:blipFill>
+          <a:blip r:embed="rId2"/>
+          <a:stretch>
+            <a:fillRect/>
+          </a:stretch>
+        </p:blipFill>
+        <p:spPr>
+          <a:xfrm>
+            <a:off x="357187" y="4848820"/>
+            <a:ext cx="178593" cy="178593"/>
+          </a:xfrm>
+          <a:prstGeom prst="rect">
+            <a:avLst/>
+          </a:prstGeom>
+        </p:spPr>
+      </p:pic>
+      <p:sp>
+        <p:nvSpPr>
+          <p:cNvPr id="6" name="TextBox 5"/>
           <p:cNvSpPr txBox="1"/>
           <p:nvPr/>
         </p:nvSpPr>
         <p:spPr>
           <a:xfrm>
-            <a:off x="540067" y="1518046"/>
-            <a:ext cx="2258568" cy="457200"/>
+            <a:off x="607218" y="4830960"/>
+            <a:ext cx="1785937" cy="178593"/>
           </a:xfrm>
           <a:prstGeom prst="rect">
             <a:avLst/>
@@ -3621,35 +3577,35 @@
               <a:lnSpc>
                 <a:spcPct val="120000"/>
               </a:lnSpc>
-              <a:defRPr sz="1800" b="1" i="0">
-                <a:solidFill>
-                  <a:srgbClr val="2C3440"/>
-                </a:solidFill>
-                <a:latin typeface="Arimo"/>
-              </a:defRPr>
-            </a:pPr>
-            <a:r>
-              <a:rPr sz="1800" b="1" i="0">
-                <a:solidFill>
-                  <a:srgbClr val="2C3440"/>
+              <a:defRPr sz="1100" b="1" i="0">
+                <a:solidFill>
+                  <a:srgbClr val="3D4A40"/>
+                </a:solidFill>
+                <a:latin typeface="Arimo"/>
+              </a:defRPr>
+            </a:pPr>
+            <a:r>
+              <a:rPr sz="1100" b="1" i="0">
+                <a:solidFill>
+                  <a:srgbClr val="3D4A40"/>
                 </a:solidFill>
                 <a:latin typeface="Arimo"/>
               </a:rPr>
-              <a:t>Сигнальные пептиды</a:t>
-            </a:r>
-          </a:p>
-        </p:txBody>
-      </p:sp>
-      <p:sp>
-        <p:nvSpPr>
-          <p:cNvPr id="8" name="TextBox 7"/>
+              <a:t>YM PROSKIN</a:t>
+            </a:r>
+          </a:p>
+        </p:txBody>
+      </p:sp>
+      <p:sp>
+        <p:nvSpPr>
+          <p:cNvPr id="7" name="TextBox 6"/>
           <p:cNvSpPr txBox="1"/>
           <p:nvPr/>
         </p:nvSpPr>
         <p:spPr>
           <a:xfrm>
-            <a:off x="540067" y="2053828"/>
-            <a:ext cx="2258568" cy="1920240"/>
+            <a:off x="8251031" y="4830960"/>
+            <a:ext cx="535781" cy="178593"/>
           </a:xfrm>
           <a:prstGeom prst="rect">
             <a:avLst/>
@@ -3662,38 +3618,128 @@
           </a:bodyPr>
           <a:lstStyle/>
           <a:p>
+            <a:pPr algn="r">
+              <a:lnSpc>
+                <a:spcPct val="120000"/>
+              </a:lnSpc>
+              <a:defRPr sz="1100" b="0" i="0">
+                <a:solidFill>
+                  <a:srgbClr val="6D8470"/>
+                </a:solidFill>
+                <a:latin typeface="Arimo"/>
+              </a:defRPr>
+            </a:pPr>
+            <a:r>
+              <a:rPr sz="1100" b="0" i="0">
+                <a:solidFill>
+                  <a:srgbClr val="6D8470"/>
+                </a:solidFill>
+                <a:latin typeface="Arimo"/>
+              </a:rPr>
+              <a:t>2</a:t>
+            </a:r>
+          </a:p>
+        </p:txBody>
+      </p:sp>
+      <p:sp>
+        <p:nvSpPr>
+          <p:cNvPr id="8" name="TextBox 7"/>
+          <p:cNvSpPr txBox="1"/>
+          <p:nvPr/>
+        </p:nvSpPr>
+        <p:spPr>
+          <a:xfrm>
+            <a:off x="357187" y="357187"/>
+            <a:ext cx="8429625" cy="401835"/>
+          </a:xfrm>
+          <a:prstGeom prst="rect">
+            <a:avLst/>
+          </a:prstGeom>
+          <a:noFill/>
+        </p:spPr>
+        <p:txBody>
+          <a:bodyPr wrap="square" tIns="0" bIns="0" lIns="0" rIns="0">
+            <a:spAutoFit/>
+          </a:bodyPr>
+          <a:lstStyle/>
+          <a:p>
             <a:pPr algn="l">
               <a:lnSpc>
                 <a:spcPct val="120000"/>
               </a:lnSpc>
-              <a:defRPr sz="1300" b="0" i="0">
-                <a:solidFill>
-                  <a:srgbClr val="3D4A40"/>
-                </a:solidFill>
-                <a:latin typeface="Arimo"/>
-              </a:defRPr>
-            </a:pPr>
-            <a:r>
-              <a:rPr sz="1300" b="0" i="0">
-                <a:solidFill>
-                  <a:srgbClr val="3D4A40"/>
+              <a:defRPr sz="2600" b="1" i="0">
+                <a:solidFill>
+                  <a:srgbClr val="2C3440"/>
+                </a:solidFill>
+                <a:latin typeface="Arimo"/>
+              </a:defRPr>
+            </a:pPr>
+            <a:r>
+              <a:rPr sz="2600" b="1" i="0">
+                <a:solidFill>
+                  <a:srgbClr val="2C3440"/>
                 </a:solidFill>
                 <a:latin typeface="Arimo"/>
               </a:rPr>
-              <a:t>Стимулируют активность фибробластов и производство коллагена, эластина и гиалуроновой кислоты для восстановления матрикса кожи.</a:t>
-            </a:r>
-          </a:p>
-        </p:txBody>
-      </p:sp>
-      <p:sp>
-        <p:nvSpPr>
-          <p:cNvPr id="9" name="Rounded Rectangle 8"/>
+              <a:t>Классификация косметических пептидов</a:t>
+            </a:r>
+          </a:p>
+        </p:txBody>
+      </p:sp>
+      <p:sp>
+        <p:nvSpPr>
+          <p:cNvPr id="9" name="TextBox 8"/>
+          <p:cNvSpPr txBox="1"/>
+          <p:nvPr/>
+        </p:nvSpPr>
+        <p:spPr>
+          <a:xfrm>
+            <a:off x="357187" y="803671"/>
+            <a:ext cx="8429625" cy="267890"/>
+          </a:xfrm>
+          <a:prstGeom prst="rect">
+            <a:avLst/>
+          </a:prstGeom>
+          <a:noFill/>
+        </p:spPr>
+        <p:txBody>
+          <a:bodyPr wrap="square" tIns="0" bIns="0" lIns="0" rIns="0">
+            <a:spAutoFit/>
+          </a:bodyPr>
+          <a:lstStyle/>
+          <a:p>
+            <a:pPr algn="l">
+              <a:lnSpc>
+                <a:spcPct val="120000"/>
+              </a:lnSpc>
+              <a:defRPr sz="1500" b="0" i="0">
+                <a:solidFill>
+                  <a:srgbClr val="6D8470"/>
+                </a:solidFill>
+                <a:latin typeface="Arimo"/>
+              </a:defRPr>
+            </a:pPr>
+            <a:r>
+              <a:rPr sz="1500" b="0" i="0">
+                <a:solidFill>
+                  <a:srgbClr val="6D8470"/>
+                </a:solidFill>
+                <a:latin typeface="Arimo"/>
+              </a:rPr>
+              <a:t>Основные функциональные группы биомиметических пептидов в косметологии</a:t>
+            </a:r>
+          </a:p>
+        </p:txBody>
+      </p:sp>
+      <p:sp>
+        <p:nvSpPr>
+          <p:cNvPr id="10" name="Rounded Rectangle 9"/>
           <p:cNvSpPr/>
           <p:nvPr/>
         </p:nvSpPr>
         <p:spPr>
           <a:xfrm>
-            <a:off x="3259335" y="1339453"/>
+            <a:off x="357187" y="1339453"/>
             <a:ext cx="2624328" cy="2834640"/>
           </a:xfrm>
           <a:prstGeom prst="roundRect">
@@ -3732,13 +3778,13 @@
       </p:sp>
       <p:sp>
         <p:nvSpPr>
-          <p:cNvPr id="10" name="TextBox 9"/>
+          <p:cNvPr id="11" name="TextBox 10"/>
           <p:cNvSpPr txBox="1"/>
           <p:nvPr/>
         </p:nvSpPr>
         <p:spPr>
           <a:xfrm>
-            <a:off x="3442215" y="1518046"/>
+            <a:off x="540067" y="1518046"/>
             <a:ext cx="2258568" cy="457200"/>
           </a:xfrm>
           <a:prstGeom prst="rect">
@@ -3770,20 +3816,20 @@
                 </a:solidFill>
                 <a:latin typeface="Arimo"/>
               </a:rPr>
-              <a:t>Пептиды-носители</a:t>
-            </a:r>
-          </a:p>
-        </p:txBody>
-      </p:sp>
-      <p:sp>
-        <p:nvSpPr>
-          <p:cNvPr id="11" name="TextBox 10"/>
+              <a:t>Сигнальные пептиды</a:t>
+            </a:r>
+          </a:p>
+        </p:txBody>
+      </p:sp>
+      <p:sp>
+        <p:nvSpPr>
+          <p:cNvPr id="12" name="TextBox 11"/>
           <p:cNvSpPr txBox="1"/>
           <p:nvPr/>
         </p:nvSpPr>
         <p:spPr>
           <a:xfrm>
-            <a:off x="3442215" y="2053828"/>
+            <a:off x="540067" y="2053828"/>
             <a:ext cx="2258568" cy="1920240"/>
           </a:xfrm>
           <a:prstGeom prst="rect">
@@ -3815,20 +3861,20 @@
                 </a:solidFill>
                 <a:latin typeface="Arimo"/>
               </a:rPr>
-              <a:t>Стабилизируют и доставляют микроэлементы (например, медь) к клеткам, ускоряя регенерацию, синтез коллагена и заживление.</a:t>
-            </a:r>
-          </a:p>
-        </p:txBody>
-      </p:sp>
-      <p:sp>
-        <p:nvSpPr>
-          <p:cNvPr id="12" name="Rounded Rectangle 11"/>
+              <a:t>Стимулируют активность фибробластов и производство коллагена, эластина и гиалуроновой кислоты для восстановления матрикса кожи.</a:t>
+            </a:r>
+          </a:p>
+        </p:txBody>
+      </p:sp>
+      <p:sp>
+        <p:nvSpPr>
+          <p:cNvPr id="13" name="Rounded Rectangle 12"/>
           <p:cNvSpPr/>
           <p:nvPr/>
         </p:nvSpPr>
         <p:spPr>
           <a:xfrm>
-            <a:off x="6161484" y="1339453"/>
+            <a:off x="3259335" y="1339453"/>
             <a:ext cx="2624328" cy="2834640"/>
           </a:xfrm>
           <a:prstGeom prst="roundRect">
@@ -3867,13 +3913,13 @@
       </p:sp>
       <p:sp>
         <p:nvSpPr>
-          <p:cNvPr id="13" name="TextBox 12"/>
+          <p:cNvPr id="14" name="TextBox 13"/>
           <p:cNvSpPr txBox="1"/>
           <p:nvPr/>
         </p:nvSpPr>
         <p:spPr>
           <a:xfrm>
-            <a:off x="6344364" y="1518046"/>
+            <a:off x="3442215" y="1518046"/>
             <a:ext cx="2258568" cy="457200"/>
           </a:xfrm>
           <a:prstGeom prst="rect">
@@ -3905,6 +3951,141 @@
                 </a:solidFill>
                 <a:latin typeface="Arimo"/>
               </a:rPr>
+              <a:t>Пептиды-носители</a:t>
+            </a:r>
+          </a:p>
+        </p:txBody>
+      </p:sp>
+      <p:sp>
+        <p:nvSpPr>
+          <p:cNvPr id="15" name="TextBox 14"/>
+          <p:cNvSpPr txBox="1"/>
+          <p:nvPr/>
+        </p:nvSpPr>
+        <p:spPr>
+          <a:xfrm>
+            <a:off x="3442215" y="2053828"/>
+            <a:ext cx="2258568" cy="1920240"/>
+          </a:xfrm>
+          <a:prstGeom prst="rect">
+            <a:avLst/>
+          </a:prstGeom>
+          <a:noFill/>
+        </p:spPr>
+        <p:txBody>
+          <a:bodyPr wrap="square" tIns="0" bIns="0" lIns="0" rIns="0">
+            <a:spAutoFit/>
+          </a:bodyPr>
+          <a:lstStyle/>
+          <a:p>
+            <a:pPr algn="l">
+              <a:lnSpc>
+                <a:spcPct val="120000"/>
+              </a:lnSpc>
+              <a:defRPr sz="1300" b="0" i="0">
+                <a:solidFill>
+                  <a:srgbClr val="3D4A40"/>
+                </a:solidFill>
+                <a:latin typeface="Arimo"/>
+              </a:defRPr>
+            </a:pPr>
+            <a:r>
+              <a:rPr sz="1300" b="0" i="0">
+                <a:solidFill>
+                  <a:srgbClr val="3D4A40"/>
+                </a:solidFill>
+                <a:latin typeface="Arimo"/>
+              </a:rPr>
+              <a:t>Стабилизируют и доставляют микроэлементы (например, медь) к клеткам, ускоряя регенерацию, синтез коллагена и заживление.</a:t>
+            </a:r>
+          </a:p>
+        </p:txBody>
+      </p:sp>
+      <p:sp>
+        <p:nvSpPr>
+          <p:cNvPr id="16" name="Rounded Rectangle 15"/>
+          <p:cNvSpPr/>
+          <p:nvPr/>
+        </p:nvSpPr>
+        <p:spPr>
+          <a:xfrm>
+            <a:off x="6161484" y="1339453"/>
+            <a:ext cx="2624328" cy="2834640"/>
+          </a:xfrm>
+          <a:prstGeom prst="roundRect">
+            <a:avLst/>
+          </a:prstGeom>
+          <a:solidFill>
+            <a:srgbClr val="E6D2CA"/>
+          </a:solidFill>
+          <a:ln w="12700">
+            <a:solidFill>
+              <a:srgbClr val="D7E0CE"/>
+            </a:solidFill>
+          </a:ln>
+        </p:spPr>
+        <p:style>
+          <a:lnRef idx="1">
+            <a:schemeClr val="accent1"/>
+          </a:lnRef>
+          <a:fillRef idx="3">
+            <a:schemeClr val="accent1"/>
+          </a:fillRef>
+          <a:effectRef idx="2">
+            <a:schemeClr val="accent1"/>
+          </a:effectRef>
+          <a:fontRef idx="minor">
+            <a:schemeClr val="lt1"/>
+          </a:fontRef>
+        </p:style>
+        <p:txBody>
+          <a:bodyPr rtlCol="0" anchor="ctr"/>
+          <a:lstStyle/>
+          <a:p>
+            <a:pPr algn="ctr"/>
+          </a:p>
+        </p:txBody>
+      </p:sp>
+      <p:sp>
+        <p:nvSpPr>
+          <p:cNvPr id="17" name="TextBox 16"/>
+          <p:cNvSpPr txBox="1"/>
+          <p:nvPr/>
+        </p:nvSpPr>
+        <p:spPr>
+          <a:xfrm>
+            <a:off x="6344364" y="1518046"/>
+            <a:ext cx="2258568" cy="457200"/>
+          </a:xfrm>
+          <a:prstGeom prst="rect">
+            <a:avLst/>
+          </a:prstGeom>
+          <a:noFill/>
+        </p:spPr>
+        <p:txBody>
+          <a:bodyPr wrap="square" tIns="0" bIns="0" lIns="0" rIns="0">
+            <a:spAutoFit/>
+          </a:bodyPr>
+          <a:lstStyle/>
+          <a:p>
+            <a:pPr algn="l">
+              <a:lnSpc>
+                <a:spcPct val="120000"/>
+              </a:lnSpc>
+              <a:defRPr sz="1800" b="1" i="0">
+                <a:solidFill>
+                  <a:srgbClr val="2C3440"/>
+                </a:solidFill>
+                <a:latin typeface="Arimo"/>
+              </a:defRPr>
+            </a:pPr>
+            <a:r>
+              <a:rPr sz="1800" b="1" i="0">
+                <a:solidFill>
+                  <a:srgbClr val="2C3440"/>
+                </a:solidFill>
+                <a:latin typeface="Arimo"/>
+              </a:rPr>
               <a:t>Ингибиторы нейротрансмиттеров</a:t>
             </a:r>
           </a:p>
@@ -3912,7 +4093,7 @@
       </p:sp>
       <p:sp>
         <p:nvSpPr>
-          <p:cNvPr id="14" name="TextBox 13"/>
+          <p:cNvPr id="18" name="TextBox 17"/>
           <p:cNvSpPr txBox="1"/>
           <p:nvPr/>
         </p:nvSpPr>
@@ -3989,7 +4170,7 @@
         </p:nvSpPr>
         <p:spPr>
           <a:xfrm>
-            <a:off x="357187" y="4643437"/>
+            <a:off x="357187" y="4464843"/>
             <a:ext cx="4572000" cy="274320"/>
           </a:xfrm>
           <a:prstGeom prst="rect">
@@ -4034,7 +4215,7 @@
         </p:nvSpPr>
         <p:spPr>
           <a:xfrm>
-            <a:off x="5029200" y="4643437"/>
+            <a:off x="5029200" y="4464843"/>
             <a:ext cx="3749039" cy="274320"/>
           </a:xfrm>
           <a:prstGeom prst="rect">
@@ -4066,21 +4247,88 @@
                 </a:solidFill>
                 <a:latin typeface="Arimo"/>
               </a:rPr>
-              <a:t>Источники: fact_0051, fact_0056, SRC-A044, SRC-A049</a:t>
-            </a:r>
-          </a:p>
-        </p:txBody>
-      </p:sp>
-      <p:sp>
-        <p:nvSpPr>
-          <p:cNvPr id="4" name="TextBox 3"/>
+              <a:t>Источники: fact_0051, fact_0052, SRC-A044, SRC-A045</a:t>
+            </a:r>
+          </a:p>
+        </p:txBody>
+      </p:sp>
+      <p:sp>
+        <p:nvSpPr>
+          <p:cNvPr id="4" name="Rectangle 3"/>
+          <p:cNvSpPr/>
+          <p:nvPr/>
+        </p:nvSpPr>
+        <p:spPr>
+          <a:xfrm>
+            <a:off x="357187" y="4732734"/>
+            <a:ext cx="8429625" cy="8929"/>
+          </a:xfrm>
+          <a:prstGeom prst="rect">
+            <a:avLst/>
+          </a:prstGeom>
+          <a:solidFill>
+            <a:srgbClr val="D7E0CE"/>
+          </a:solidFill>
+          <a:ln>
+            <a:noFill/>
+          </a:ln>
+        </p:spPr>
+        <p:style>
+          <a:lnRef idx="1">
+            <a:schemeClr val="accent1"/>
+          </a:lnRef>
+          <a:fillRef idx="3">
+            <a:schemeClr val="accent1"/>
+          </a:fillRef>
+          <a:effectRef idx="2">
+            <a:schemeClr val="accent1"/>
+          </a:effectRef>
+          <a:fontRef idx="minor">
+            <a:schemeClr val="lt1"/>
+          </a:fontRef>
+        </p:style>
+        <p:txBody>
+          <a:bodyPr rtlCol="0" anchor="ctr"/>
+          <a:lstStyle/>
+          <a:p>
+            <a:pPr algn="ctr"/>
+          </a:p>
+        </p:txBody>
+      </p:sp>
+      <p:pic>
+        <p:nvPicPr>
+          <p:cNvPr id="5" name="Picture 4" descr="mark_6D8470.png"/>
+          <p:cNvPicPr>
+            <a:picLocks noChangeAspect="1"/>
+          </p:cNvPicPr>
+          <p:nvPr/>
+        </p:nvPicPr>
+        <p:blipFill>
+          <a:blip r:embed="rId2"/>
+          <a:stretch>
+            <a:fillRect/>
+          </a:stretch>
+        </p:blipFill>
+        <p:spPr>
+          <a:xfrm>
+            <a:off x="357187" y="4848820"/>
+            <a:ext cx="178593" cy="178593"/>
+          </a:xfrm>
+          <a:prstGeom prst="rect">
+            <a:avLst/>
+          </a:prstGeom>
+        </p:spPr>
+      </p:pic>
+      <p:sp>
+        <p:nvSpPr>
+          <p:cNvPr id="6" name="TextBox 5"/>
           <p:cNvSpPr txBox="1"/>
           <p:nvPr/>
         </p:nvSpPr>
         <p:spPr>
           <a:xfrm>
-            <a:off x="357187" y="357187"/>
-            <a:ext cx="8429625" cy="401835"/>
+            <a:off x="607218" y="4830960"/>
+            <a:ext cx="1785937" cy="178593"/>
           </a:xfrm>
           <a:prstGeom prst="rect">
             <a:avLst/>
@@ -4097,35 +4345,35 @@
               <a:lnSpc>
                 <a:spcPct val="120000"/>
               </a:lnSpc>
-              <a:defRPr sz="2600" b="1" i="0">
-                <a:solidFill>
-                  <a:srgbClr val="2C3440"/>
-                </a:solidFill>
-                <a:latin typeface="Arimo"/>
-              </a:defRPr>
-            </a:pPr>
-            <a:r>
-              <a:rPr sz="2600" b="1" i="0">
-                <a:solidFill>
-                  <a:srgbClr val="2C3440"/>
+              <a:defRPr sz="1100" b="1" i="0">
+                <a:solidFill>
+                  <a:srgbClr val="3D4A40"/>
+                </a:solidFill>
+                <a:latin typeface="Arimo"/>
+              </a:defRPr>
+            </a:pPr>
+            <a:r>
+              <a:rPr sz="1100" b="1" i="0">
+                <a:solidFill>
+                  <a:srgbClr val="3D4A40"/>
                 </a:solidFill>
                 <a:latin typeface="Arimo"/>
               </a:rPr>
-              <a:t>Сигнальные пептиды (Signal Peptides)</a:t>
-            </a:r>
-          </a:p>
-        </p:txBody>
-      </p:sp>
-      <p:sp>
-        <p:nvSpPr>
-          <p:cNvPr id="5" name="TextBox 4"/>
+              <a:t>YM PROSKIN</a:t>
+            </a:r>
+          </a:p>
+        </p:txBody>
+      </p:sp>
+      <p:sp>
+        <p:nvSpPr>
+          <p:cNvPr id="7" name="TextBox 6"/>
           <p:cNvSpPr txBox="1"/>
           <p:nvPr/>
         </p:nvSpPr>
         <p:spPr>
           <a:xfrm>
-            <a:off x="357187" y="803671"/>
-            <a:ext cx="8429625" cy="267890"/>
+            <a:off x="8251031" y="4830960"/>
+            <a:ext cx="535781" cy="178593"/>
           </a:xfrm>
           <a:prstGeom prst="rect">
             <a:avLst/>
@@ -4138,11 +4386,11 @@
           </a:bodyPr>
           <a:lstStyle/>
           <a:p>
-            <a:pPr algn="l">
-              <a:lnSpc>
-                <a:spcPct val="120000"/>
-              </a:lnSpc>
-              <a:defRPr sz="1500" b="0" i="0">
+            <a:pPr algn="r">
+              <a:lnSpc>
+                <a:spcPct val="120000"/>
+              </a:lnSpc>
+              <a:defRPr sz="1100" b="0" i="0">
                 <a:solidFill>
                   <a:srgbClr val="6D8470"/>
                 </a:solidFill>
@@ -4150,27 +4398,27 @@
               </a:defRPr>
             </a:pPr>
             <a:r>
-              <a:rPr sz="1500" b="0" i="0">
+              <a:rPr sz="1100" b="0" i="0">
                 <a:solidFill>
                   <a:srgbClr val="6D8470"/>
                 </a:solidFill>
                 <a:latin typeface="Arimo"/>
               </a:rPr>
-              <a:t>Стимуляция синтеза внеклеточного матрикса и неоколлагенеза</a:t>
-            </a:r>
-          </a:p>
-        </p:txBody>
-      </p:sp>
-      <p:sp>
-        <p:nvSpPr>
-          <p:cNvPr id="6" name="TextBox 5"/>
+              <a:t>3</a:t>
+            </a:r>
+          </a:p>
+        </p:txBody>
+      </p:sp>
+      <p:sp>
+        <p:nvSpPr>
+          <p:cNvPr id="8" name="TextBox 7"/>
           <p:cNvSpPr txBox="1"/>
           <p:nvPr/>
         </p:nvSpPr>
         <p:spPr>
           <a:xfrm>
-            <a:off x="357187" y="1339453"/>
-            <a:ext cx="4572000" cy="2926080"/>
+            <a:off x="357187" y="357187"/>
+            <a:ext cx="8429625" cy="401835"/>
           </a:xfrm>
           <a:prstGeom prst="rect">
             <a:avLst/>
@@ -4187,6 +4435,96 @@
               <a:lnSpc>
                 <a:spcPct val="120000"/>
               </a:lnSpc>
+              <a:defRPr sz="2600" b="1" i="0">
+                <a:solidFill>
+                  <a:srgbClr val="2C3440"/>
+                </a:solidFill>
+                <a:latin typeface="Arimo"/>
+              </a:defRPr>
+            </a:pPr>
+            <a:r>
+              <a:rPr sz="2600" b="1" i="0">
+                <a:solidFill>
+                  <a:srgbClr val="2C3440"/>
+                </a:solidFill>
+                <a:latin typeface="Arimo"/>
+              </a:rPr>
+              <a:t>Сигнальные пептиды (Signal Peptides)</a:t>
+            </a:r>
+          </a:p>
+        </p:txBody>
+      </p:sp>
+      <p:sp>
+        <p:nvSpPr>
+          <p:cNvPr id="9" name="TextBox 8"/>
+          <p:cNvSpPr txBox="1"/>
+          <p:nvPr/>
+        </p:nvSpPr>
+        <p:spPr>
+          <a:xfrm>
+            <a:off x="357187" y="803671"/>
+            <a:ext cx="8429625" cy="267890"/>
+          </a:xfrm>
+          <a:prstGeom prst="rect">
+            <a:avLst/>
+          </a:prstGeom>
+          <a:noFill/>
+        </p:spPr>
+        <p:txBody>
+          <a:bodyPr wrap="square" tIns="0" bIns="0" lIns="0" rIns="0">
+            <a:spAutoFit/>
+          </a:bodyPr>
+          <a:lstStyle/>
+          <a:p>
+            <a:pPr algn="l">
+              <a:lnSpc>
+                <a:spcPct val="120000"/>
+              </a:lnSpc>
+              <a:defRPr sz="1500" b="0" i="0">
+                <a:solidFill>
+                  <a:srgbClr val="6D8470"/>
+                </a:solidFill>
+                <a:latin typeface="Arimo"/>
+              </a:defRPr>
+            </a:pPr>
+            <a:r>
+              <a:rPr sz="1500" b="0" i="0">
+                <a:solidFill>
+                  <a:srgbClr val="6D8470"/>
+                </a:solidFill>
+                <a:latin typeface="Arimo"/>
+              </a:rPr>
+              <a:t>Стимуляция синтеза внеклеточного матрикса и неоколлагенеза</a:t>
+            </a:r>
+          </a:p>
+        </p:txBody>
+      </p:sp>
+      <p:sp>
+        <p:nvSpPr>
+          <p:cNvPr id="10" name="TextBox 9"/>
+          <p:cNvSpPr txBox="1"/>
+          <p:nvPr/>
+        </p:nvSpPr>
+        <p:spPr>
+          <a:xfrm>
+            <a:off x="357187" y="1339453"/>
+            <a:ext cx="4572000" cy="2926080"/>
+          </a:xfrm>
+          <a:prstGeom prst="rect">
+            <a:avLst/>
+          </a:prstGeom>
+          <a:noFill/>
+        </p:spPr>
+        <p:txBody>
+          <a:bodyPr wrap="square" tIns="0" bIns="0" lIns="0" rIns="0">
+            <a:spAutoFit/>
+          </a:bodyPr>
+          <a:lstStyle/>
+          <a:p>
+            <a:pPr algn="l">
+              <a:lnSpc>
+                <a:spcPct val="120000"/>
+              </a:lnSpc>
               <a:defRPr sz="1500" b="0" i="0">
                 <a:solidFill>
                   <a:srgbClr val="3D4A40"/>
@@ -4236,7 +4574,7 @@
                 </a:solidFill>
                 <a:latin typeface="Arimo"/>
               </a:rPr>
-              <a:t>• Пальмитоил трипептид-1 (pal-GHK) действует как вестник для стимуляции синтеза коллагена и гликозаминогликанов.</a:t>
+              <a:t>• Медный трипептид-1 (GHK-Cu) стимулирует синтез коллагена и гликозаминогликанов при ремоделировании тканей.</a:t>
             </a:r>
           </a:p>
           <a:p>
@@ -4278,7 +4616,7 @@
       </p:sp>
       <p:sp>
         <p:nvSpPr>
-          <p:cNvPr id="7" name="Rounded Rectangle 6"/>
+          <p:cNvPr id="11" name="Rounded Rectangle 10"/>
           <p:cNvSpPr/>
           <p:nvPr/>
         </p:nvSpPr>
@@ -4371,7 +4709,7 @@
         </p:nvSpPr>
         <p:spPr>
           <a:xfrm>
-            <a:off x="357187" y="4643437"/>
+            <a:off x="357187" y="4464843"/>
             <a:ext cx="4572000" cy="274320"/>
           </a:xfrm>
           <a:prstGeom prst="rect">
@@ -4416,7 +4754,7 @@
         </p:nvSpPr>
         <p:spPr>
           <a:xfrm>
-            <a:off x="5029200" y="4643437"/>
+            <a:off x="5029200" y="4464843"/>
             <a:ext cx="3749039" cy="274320"/>
           </a:xfrm>
           <a:prstGeom prst="rect">
@@ -4455,14 +4793,81 @@
       </p:sp>
       <p:sp>
         <p:nvSpPr>
-          <p:cNvPr id="4" name="TextBox 3"/>
+          <p:cNvPr id="4" name="Rectangle 3"/>
+          <p:cNvSpPr/>
+          <p:nvPr/>
+        </p:nvSpPr>
+        <p:spPr>
+          <a:xfrm>
+            <a:off x="357187" y="4732734"/>
+            <a:ext cx="8429625" cy="8929"/>
+          </a:xfrm>
+          <a:prstGeom prst="rect">
+            <a:avLst/>
+          </a:prstGeom>
+          <a:solidFill>
+            <a:srgbClr val="D7E0CE"/>
+          </a:solidFill>
+          <a:ln>
+            <a:noFill/>
+          </a:ln>
+        </p:spPr>
+        <p:style>
+          <a:lnRef idx="1">
+            <a:schemeClr val="accent1"/>
+          </a:lnRef>
+          <a:fillRef idx="3">
+            <a:schemeClr val="accent1"/>
+          </a:fillRef>
+          <a:effectRef idx="2">
+            <a:schemeClr val="accent1"/>
+          </a:effectRef>
+          <a:fontRef idx="minor">
+            <a:schemeClr val="lt1"/>
+          </a:fontRef>
+        </p:style>
+        <p:txBody>
+          <a:bodyPr rtlCol="0" anchor="ctr"/>
+          <a:lstStyle/>
+          <a:p>
+            <a:pPr algn="ctr"/>
+          </a:p>
+        </p:txBody>
+      </p:sp>
+      <p:pic>
+        <p:nvPicPr>
+          <p:cNvPr id="5" name="Picture 4" descr="mark_6D8470.png"/>
+          <p:cNvPicPr>
+            <a:picLocks noChangeAspect="1"/>
+          </p:cNvPicPr>
+          <p:nvPr/>
+        </p:nvPicPr>
+        <p:blipFill>
+          <a:blip r:embed="rId2"/>
+          <a:stretch>
+            <a:fillRect/>
+          </a:stretch>
+        </p:blipFill>
+        <p:spPr>
+          <a:xfrm>
+            <a:off x="357187" y="4848820"/>
+            <a:ext cx="178593" cy="178593"/>
+          </a:xfrm>
+          <a:prstGeom prst="rect">
+            <a:avLst/>
+          </a:prstGeom>
+        </p:spPr>
+      </p:pic>
+      <p:sp>
+        <p:nvSpPr>
+          <p:cNvPr id="6" name="TextBox 5"/>
           <p:cNvSpPr txBox="1"/>
           <p:nvPr/>
         </p:nvSpPr>
         <p:spPr>
           <a:xfrm>
-            <a:off x="357187" y="357187"/>
-            <a:ext cx="8429625" cy="401835"/>
+            <a:off x="607218" y="4830960"/>
+            <a:ext cx="1785937" cy="178593"/>
           </a:xfrm>
           <a:prstGeom prst="rect">
             <a:avLst/>
@@ -4479,35 +4884,35 @@
               <a:lnSpc>
                 <a:spcPct val="120000"/>
               </a:lnSpc>
-              <a:defRPr sz="2600" b="1" i="0">
-                <a:solidFill>
-                  <a:srgbClr val="2C3440"/>
-                </a:solidFill>
-                <a:latin typeface="Arimo"/>
-              </a:defRPr>
-            </a:pPr>
-            <a:r>
-              <a:rPr sz="2600" b="1" i="0">
-                <a:solidFill>
-                  <a:srgbClr val="2C3440"/>
+              <a:defRPr sz="1100" b="1" i="0">
+                <a:solidFill>
+                  <a:srgbClr val="3D4A40"/>
+                </a:solidFill>
+                <a:latin typeface="Arimo"/>
+              </a:defRPr>
+            </a:pPr>
+            <a:r>
+              <a:rPr sz="1100" b="1" i="0">
+                <a:solidFill>
+                  <a:srgbClr val="3D4A40"/>
                 </a:solidFill>
                 <a:latin typeface="Arimo"/>
               </a:rPr>
-              <a:t>Пептиды-носители (Carrier Peptides)</a:t>
-            </a:r>
-          </a:p>
-        </p:txBody>
-      </p:sp>
-      <p:sp>
-        <p:nvSpPr>
-          <p:cNvPr id="5" name="TextBox 4"/>
+              <a:t>YM PROSKIN</a:t>
+            </a:r>
+          </a:p>
+        </p:txBody>
+      </p:sp>
+      <p:sp>
+        <p:nvSpPr>
+          <p:cNvPr id="7" name="TextBox 6"/>
           <p:cNvSpPr txBox="1"/>
           <p:nvPr/>
         </p:nvSpPr>
         <p:spPr>
           <a:xfrm>
-            <a:off x="357187" y="803671"/>
-            <a:ext cx="8429625" cy="267890"/>
+            <a:off x="8251031" y="4830960"/>
+            <a:ext cx="535781" cy="178593"/>
           </a:xfrm>
           <a:prstGeom prst="rect">
             <a:avLst/>
@@ -4520,11 +4925,11 @@
           </a:bodyPr>
           <a:lstStyle/>
           <a:p>
-            <a:pPr algn="l">
-              <a:lnSpc>
-                <a:spcPct val="120000"/>
-              </a:lnSpc>
-              <a:defRPr sz="1500" b="0" i="0">
+            <a:pPr algn="r">
+              <a:lnSpc>
+                <a:spcPct val="120000"/>
+              </a:lnSpc>
+              <a:defRPr sz="1100" b="0" i="0">
                 <a:solidFill>
                   <a:srgbClr val="6D8470"/>
                 </a:solidFill>
@@ -4532,27 +4937,27 @@
               </a:defRPr>
             </a:pPr>
             <a:r>
-              <a:rPr sz="1500" b="0" i="0">
+              <a:rPr sz="1100" b="0" i="0">
                 <a:solidFill>
                   <a:srgbClr val="6D8470"/>
                 </a:solidFill>
                 <a:latin typeface="Arimo"/>
               </a:rPr>
-              <a:t>Медный трипептид GHK-Cu в процессах ремоделирования и регенерации</a:t>
-            </a:r>
-          </a:p>
-        </p:txBody>
-      </p:sp>
-      <p:sp>
-        <p:nvSpPr>
-          <p:cNvPr id="6" name="TextBox 5"/>
+              <a:t>4</a:t>
+            </a:r>
+          </a:p>
+        </p:txBody>
+      </p:sp>
+      <p:sp>
+        <p:nvSpPr>
+          <p:cNvPr id="8" name="TextBox 7"/>
           <p:cNvSpPr txBox="1"/>
           <p:nvPr/>
         </p:nvSpPr>
         <p:spPr>
           <a:xfrm>
-            <a:off x="357187" y="1339453"/>
-            <a:ext cx="4572000" cy="2926080"/>
+            <a:off x="357187" y="357187"/>
+            <a:ext cx="8429625" cy="401835"/>
           </a:xfrm>
           <a:prstGeom prst="rect">
             <a:avLst/>
@@ -4569,6 +4974,96 @@
               <a:lnSpc>
                 <a:spcPct val="120000"/>
               </a:lnSpc>
+              <a:defRPr sz="2600" b="1" i="0">
+                <a:solidFill>
+                  <a:srgbClr val="2C3440"/>
+                </a:solidFill>
+                <a:latin typeface="Arimo"/>
+              </a:defRPr>
+            </a:pPr>
+            <a:r>
+              <a:rPr sz="2600" b="1" i="0">
+                <a:solidFill>
+                  <a:srgbClr val="2C3440"/>
+                </a:solidFill>
+                <a:latin typeface="Arimo"/>
+              </a:rPr>
+              <a:t>Пептиды-носители (Carrier Peptides)</a:t>
+            </a:r>
+          </a:p>
+        </p:txBody>
+      </p:sp>
+      <p:sp>
+        <p:nvSpPr>
+          <p:cNvPr id="9" name="TextBox 8"/>
+          <p:cNvSpPr txBox="1"/>
+          <p:nvPr/>
+        </p:nvSpPr>
+        <p:spPr>
+          <a:xfrm>
+            <a:off x="357187" y="803671"/>
+            <a:ext cx="8429625" cy="267890"/>
+          </a:xfrm>
+          <a:prstGeom prst="rect">
+            <a:avLst/>
+          </a:prstGeom>
+          <a:noFill/>
+        </p:spPr>
+        <p:txBody>
+          <a:bodyPr wrap="square" tIns="0" bIns="0" lIns="0" rIns="0">
+            <a:spAutoFit/>
+          </a:bodyPr>
+          <a:lstStyle/>
+          <a:p>
+            <a:pPr algn="l">
+              <a:lnSpc>
+                <a:spcPct val="120000"/>
+              </a:lnSpc>
+              <a:defRPr sz="1500" b="0" i="0">
+                <a:solidFill>
+                  <a:srgbClr val="6D8470"/>
+                </a:solidFill>
+                <a:latin typeface="Arimo"/>
+              </a:defRPr>
+            </a:pPr>
+            <a:r>
+              <a:rPr sz="1500" b="0" i="0">
+                <a:solidFill>
+                  <a:srgbClr val="6D8470"/>
+                </a:solidFill>
+                <a:latin typeface="Arimo"/>
+              </a:rPr>
+              <a:t>Медный трипептид GHK-Cu в процессах ремоделирования и регенерации</a:t>
+            </a:r>
+          </a:p>
+        </p:txBody>
+      </p:sp>
+      <p:sp>
+        <p:nvSpPr>
+          <p:cNvPr id="10" name="TextBox 9"/>
+          <p:cNvSpPr txBox="1"/>
+          <p:nvPr/>
+        </p:nvSpPr>
+        <p:spPr>
+          <a:xfrm>
+            <a:off x="357187" y="1339453"/>
+            <a:ext cx="4572000" cy="2926080"/>
+          </a:xfrm>
+          <a:prstGeom prst="rect">
+            <a:avLst/>
+          </a:prstGeom>
+          <a:noFill/>
+        </p:spPr>
+        <p:txBody>
+          <a:bodyPr wrap="square" tIns="0" bIns="0" lIns="0" rIns="0">
+            <a:spAutoFit/>
+          </a:bodyPr>
+          <a:lstStyle/>
+          <a:p>
+            <a:pPr algn="l">
+              <a:lnSpc>
+                <a:spcPct val="120000"/>
+              </a:lnSpc>
               <a:defRPr sz="1500" b="0" i="0">
                 <a:solidFill>
                   <a:srgbClr val="3D4A40"/>
@@ -4660,7 +5155,7 @@
       </p:sp>
       <p:sp>
         <p:nvSpPr>
-          <p:cNvPr id="7" name="Rounded Rectangle 6"/>
+          <p:cNvPr id="11" name="Rounded Rectangle 10"/>
           <p:cNvSpPr/>
           <p:nvPr/>
         </p:nvSpPr>
@@ -4753,7 +5248,7 @@
         </p:nvSpPr>
         <p:spPr>
           <a:xfrm>
-            <a:off x="357187" y="4643437"/>
+            <a:off x="357187" y="4464843"/>
             <a:ext cx="4572000" cy="274320"/>
           </a:xfrm>
           <a:prstGeom prst="rect">
@@ -4798,7 +5293,7 @@
         </p:nvSpPr>
         <p:spPr>
           <a:xfrm>
-            <a:off x="5029200" y="4643437"/>
+            <a:off x="5029200" y="4464843"/>
             <a:ext cx="3749039" cy="274320"/>
           </a:xfrm>
           <a:prstGeom prst="rect">
@@ -4837,14 +5332,81 @@
       </p:sp>
       <p:sp>
         <p:nvSpPr>
-          <p:cNvPr id="4" name="TextBox 3"/>
+          <p:cNvPr id="4" name="Rectangle 3"/>
+          <p:cNvSpPr/>
+          <p:nvPr/>
+        </p:nvSpPr>
+        <p:spPr>
+          <a:xfrm>
+            <a:off x="357187" y="4732734"/>
+            <a:ext cx="8429625" cy="8929"/>
+          </a:xfrm>
+          <a:prstGeom prst="rect">
+            <a:avLst/>
+          </a:prstGeom>
+          <a:solidFill>
+            <a:srgbClr val="D7E0CE"/>
+          </a:solidFill>
+          <a:ln>
+            <a:noFill/>
+          </a:ln>
+        </p:spPr>
+        <p:style>
+          <a:lnRef idx="1">
+            <a:schemeClr val="accent1"/>
+          </a:lnRef>
+          <a:fillRef idx="3">
+            <a:schemeClr val="accent1"/>
+          </a:fillRef>
+          <a:effectRef idx="2">
+            <a:schemeClr val="accent1"/>
+          </a:effectRef>
+          <a:fontRef idx="minor">
+            <a:schemeClr val="lt1"/>
+          </a:fontRef>
+        </p:style>
+        <p:txBody>
+          <a:bodyPr rtlCol="0" anchor="ctr"/>
+          <a:lstStyle/>
+          <a:p>
+            <a:pPr algn="ctr"/>
+          </a:p>
+        </p:txBody>
+      </p:sp>
+      <p:pic>
+        <p:nvPicPr>
+          <p:cNvPr id="5" name="Picture 4" descr="mark_6D8470.png"/>
+          <p:cNvPicPr>
+            <a:picLocks noChangeAspect="1"/>
+          </p:cNvPicPr>
+          <p:nvPr/>
+        </p:nvPicPr>
+        <p:blipFill>
+          <a:blip r:embed="rId2"/>
+          <a:stretch>
+            <a:fillRect/>
+          </a:stretch>
+        </p:blipFill>
+        <p:spPr>
+          <a:xfrm>
+            <a:off x="357187" y="4848820"/>
+            <a:ext cx="178593" cy="178593"/>
+          </a:xfrm>
+          <a:prstGeom prst="rect">
+            <a:avLst/>
+          </a:prstGeom>
+        </p:spPr>
+      </p:pic>
+      <p:sp>
+        <p:nvSpPr>
+          <p:cNvPr id="6" name="TextBox 5"/>
           <p:cNvSpPr txBox="1"/>
           <p:nvPr/>
         </p:nvSpPr>
         <p:spPr>
           <a:xfrm>
-            <a:off x="357187" y="357187"/>
-            <a:ext cx="8429625" cy="401835"/>
+            <a:off x="607218" y="4830960"/>
+            <a:ext cx="1785937" cy="178593"/>
           </a:xfrm>
           <a:prstGeom prst="rect">
             <a:avLst/>
@@ -4861,35 +5423,35 @@
               <a:lnSpc>
                 <a:spcPct val="120000"/>
               </a:lnSpc>
-              <a:defRPr sz="2600" b="1" i="0">
-                <a:solidFill>
-                  <a:srgbClr val="2C3440"/>
-                </a:solidFill>
-                <a:latin typeface="Arimo"/>
-              </a:defRPr>
-            </a:pPr>
-            <a:r>
-              <a:rPr sz="2600" b="1" i="0">
-                <a:solidFill>
-                  <a:srgbClr val="2C3440"/>
+              <a:defRPr sz="1100" b="1" i="0">
+                <a:solidFill>
+                  <a:srgbClr val="3D4A40"/>
+                </a:solidFill>
+                <a:latin typeface="Arimo"/>
+              </a:defRPr>
+            </a:pPr>
+            <a:r>
+              <a:rPr sz="1100" b="1" i="0">
+                <a:solidFill>
+                  <a:srgbClr val="3D4A40"/>
                 </a:solidFill>
                 <a:latin typeface="Arimo"/>
               </a:rPr>
-              <a:t>Ингибиторы нейротрансмиттеров</a:t>
-            </a:r>
-          </a:p>
-        </p:txBody>
-      </p:sp>
-      <p:sp>
-        <p:nvSpPr>
-          <p:cNvPr id="5" name="TextBox 4"/>
+              <a:t>YM PROSKIN</a:t>
+            </a:r>
+          </a:p>
+        </p:txBody>
+      </p:sp>
+      <p:sp>
+        <p:nvSpPr>
+          <p:cNvPr id="7" name="TextBox 6"/>
           <p:cNvSpPr txBox="1"/>
           <p:nvPr/>
         </p:nvSpPr>
         <p:spPr>
           <a:xfrm>
-            <a:off x="357187" y="803671"/>
-            <a:ext cx="8429625" cy="267890"/>
+            <a:off x="8251031" y="4830960"/>
+            <a:ext cx="535781" cy="178593"/>
           </a:xfrm>
           <a:prstGeom prst="rect">
             <a:avLst/>
@@ -4902,11 +5464,11 @@
           </a:bodyPr>
           <a:lstStyle/>
           <a:p>
-            <a:pPr algn="l">
-              <a:lnSpc>
-                <a:spcPct val="120000"/>
-              </a:lnSpc>
-              <a:defRPr sz="1500" b="0" i="0">
+            <a:pPr algn="r">
+              <a:lnSpc>
+                <a:spcPct val="120000"/>
+              </a:lnSpc>
+              <a:defRPr sz="1100" b="0" i="0">
                 <a:solidFill>
                   <a:srgbClr val="6D8470"/>
                 </a:solidFill>
@@ -4914,27 +5476,27 @@
               </a:defRPr>
             </a:pPr>
             <a:r>
-              <a:rPr sz="1500" b="0" i="0">
+              <a:rPr sz="1100" b="0" i="0">
                 <a:solidFill>
                   <a:srgbClr val="6D8470"/>
                 </a:solidFill>
                 <a:latin typeface="Arimo"/>
               </a:rPr>
-              <a:t>Аргирелин как альтернатива инъекционной нейромодуляции мимических морщин</a:t>
-            </a:r>
-          </a:p>
-        </p:txBody>
-      </p:sp>
-      <p:sp>
-        <p:nvSpPr>
-          <p:cNvPr id="6" name="TextBox 5"/>
+              <a:t>5</a:t>
+            </a:r>
+          </a:p>
+        </p:txBody>
+      </p:sp>
+      <p:sp>
+        <p:nvSpPr>
+          <p:cNvPr id="8" name="TextBox 7"/>
           <p:cNvSpPr txBox="1"/>
           <p:nvPr/>
         </p:nvSpPr>
         <p:spPr>
           <a:xfrm>
-            <a:off x="357187" y="1339453"/>
-            <a:ext cx="4572000" cy="2926080"/>
+            <a:off x="357187" y="357187"/>
+            <a:ext cx="8429625" cy="401835"/>
           </a:xfrm>
           <a:prstGeom prst="rect">
             <a:avLst/>
@@ -4951,6 +5513,96 @@
               <a:lnSpc>
                 <a:spcPct val="120000"/>
               </a:lnSpc>
+              <a:defRPr sz="2600" b="1" i="0">
+                <a:solidFill>
+                  <a:srgbClr val="2C3440"/>
+                </a:solidFill>
+                <a:latin typeface="Arimo"/>
+              </a:defRPr>
+            </a:pPr>
+            <a:r>
+              <a:rPr sz="2600" b="1" i="0">
+                <a:solidFill>
+                  <a:srgbClr val="2C3440"/>
+                </a:solidFill>
+                <a:latin typeface="Arimo"/>
+              </a:rPr>
+              <a:t>Ингибиторы нейротрансмиттеров</a:t>
+            </a:r>
+          </a:p>
+        </p:txBody>
+      </p:sp>
+      <p:sp>
+        <p:nvSpPr>
+          <p:cNvPr id="9" name="TextBox 8"/>
+          <p:cNvSpPr txBox="1"/>
+          <p:nvPr/>
+        </p:nvSpPr>
+        <p:spPr>
+          <a:xfrm>
+            <a:off x="357187" y="803671"/>
+            <a:ext cx="8429625" cy="267890"/>
+          </a:xfrm>
+          <a:prstGeom prst="rect">
+            <a:avLst/>
+          </a:prstGeom>
+          <a:noFill/>
+        </p:spPr>
+        <p:txBody>
+          <a:bodyPr wrap="square" tIns="0" bIns="0" lIns="0" rIns="0">
+            <a:spAutoFit/>
+          </a:bodyPr>
+          <a:lstStyle/>
+          <a:p>
+            <a:pPr algn="l">
+              <a:lnSpc>
+                <a:spcPct val="120000"/>
+              </a:lnSpc>
+              <a:defRPr sz="1500" b="0" i="0">
+                <a:solidFill>
+                  <a:srgbClr val="6D8470"/>
+                </a:solidFill>
+                <a:latin typeface="Arimo"/>
+              </a:defRPr>
+            </a:pPr>
+            <a:r>
+              <a:rPr sz="1500" b="0" i="0">
+                <a:solidFill>
+                  <a:srgbClr val="6D8470"/>
+                </a:solidFill>
+                <a:latin typeface="Arimo"/>
+              </a:rPr>
+              <a:t>Аргирелин как альтернатива инъекционной нейромодуляции мимических морщин</a:t>
+            </a:r>
+          </a:p>
+        </p:txBody>
+      </p:sp>
+      <p:sp>
+        <p:nvSpPr>
+          <p:cNvPr id="10" name="TextBox 9"/>
+          <p:cNvSpPr txBox="1"/>
+          <p:nvPr/>
+        </p:nvSpPr>
+        <p:spPr>
+          <a:xfrm>
+            <a:off x="357187" y="1339453"/>
+            <a:ext cx="4572000" cy="2926080"/>
+          </a:xfrm>
+          <a:prstGeom prst="rect">
+            <a:avLst/>
+          </a:prstGeom>
+          <a:noFill/>
+        </p:spPr>
+        <p:txBody>
+          <a:bodyPr wrap="square" tIns="0" bIns="0" lIns="0" rIns="0">
+            <a:spAutoFit/>
+          </a:bodyPr>
+          <a:lstStyle/>
+          <a:p>
+            <a:pPr algn="l">
+              <a:lnSpc>
+                <a:spcPct val="120000"/>
+              </a:lnSpc>
               <a:defRPr sz="1500" b="0" i="0">
                 <a:solidFill>
                   <a:srgbClr val="3D4A40"/>
@@ -5042,7 +5694,7 @@
       </p:sp>
       <p:sp>
         <p:nvSpPr>
-          <p:cNvPr id="7" name="Rounded Rectangle 6"/>
+          <p:cNvPr id="11" name="Rounded Rectangle 10"/>
           <p:cNvSpPr/>
           <p:nvPr/>
         </p:nvSpPr>
@@ -5135,7 +5787,7 @@
         </p:nvSpPr>
         <p:spPr>
           <a:xfrm>
-            <a:off x="357187" y="4643437"/>
+            <a:off x="357187" y="4464843"/>
             <a:ext cx="4572000" cy="274320"/>
           </a:xfrm>
           <a:prstGeom prst="rect">
@@ -5180,7 +5832,7 @@
         </p:nvSpPr>
         <p:spPr>
           <a:xfrm>
-            <a:off x="5029200" y="4643437"/>
+            <a:off x="5029200" y="4464843"/>
             <a:ext cx="3749039" cy="274320"/>
           </a:xfrm>
           <a:prstGeom prst="rect">
@@ -5212,122 +5864,30 @@
                 </a:solidFill>
                 <a:latin typeface="Arimo"/>
               </a:rPr>
-              <a:t>Источники: fact_0056, fact_0057, fact_0058, SRC-A049, SRC-A050, SRC-A051</a:t>
-            </a:r>
-          </a:p>
-        </p:txBody>
-      </p:sp>
-      <p:sp>
-        <p:nvSpPr>
-          <p:cNvPr id="4" name="TextBox 3"/>
-          <p:cNvSpPr txBox="1"/>
-          <p:nvPr/>
-        </p:nvSpPr>
-        <p:spPr>
-          <a:xfrm>
-            <a:off x="357187" y="357187"/>
-            <a:ext cx="8429625" cy="401835"/>
-          </a:xfrm>
-          <a:prstGeom prst="rect">
-            <a:avLst/>
-          </a:prstGeom>
-          <a:noFill/>
-        </p:spPr>
-        <p:txBody>
-          <a:bodyPr wrap="square" tIns="0" bIns="0" lIns="0" rIns="0">
-            <a:spAutoFit/>
-          </a:bodyPr>
-          <a:lstStyle/>
-          <a:p>
-            <a:pPr algn="l">
-              <a:lnSpc>
-                <a:spcPct val="120000"/>
-              </a:lnSpc>
-              <a:defRPr sz="2600" b="1" i="0">
-                <a:solidFill>
-                  <a:srgbClr val="2C3440"/>
-                </a:solidFill>
-                <a:latin typeface="Arimo"/>
-              </a:defRPr>
-            </a:pPr>
-            <a:r>
-              <a:rPr sz="2600" b="1" i="0">
-                <a:solidFill>
-                  <a:srgbClr val="2C3440"/>
-                </a:solidFill>
-                <a:latin typeface="Arimo"/>
-              </a:rPr>
-              <a:t>Специализированные пептиды</a:t>
-            </a:r>
-          </a:p>
-        </p:txBody>
-      </p:sp>
-      <p:sp>
-        <p:nvSpPr>
-          <p:cNvPr id="5" name="TextBox 4"/>
-          <p:cNvSpPr txBox="1"/>
-          <p:nvPr/>
-        </p:nvSpPr>
-        <p:spPr>
-          <a:xfrm>
-            <a:off x="357187" y="803671"/>
-            <a:ext cx="8429625" cy="267890"/>
-          </a:xfrm>
-          <a:prstGeom prst="rect">
-            <a:avLst/>
-          </a:prstGeom>
-          <a:noFill/>
-        </p:spPr>
-        <p:txBody>
-          <a:bodyPr wrap="square" tIns="0" bIns="0" lIns="0" rIns="0">
-            <a:spAutoFit/>
-          </a:bodyPr>
-          <a:lstStyle/>
-          <a:p>
-            <a:pPr algn="l">
-              <a:lnSpc>
-                <a:spcPct val="120000"/>
-              </a:lnSpc>
-              <a:defRPr sz="1500" b="0" i="0">
-                <a:solidFill>
-                  <a:srgbClr val="6D8470"/>
-                </a:solidFill>
-                <a:latin typeface="Arimo"/>
-              </a:defRPr>
-            </a:pPr>
-            <a:r>
-              <a:rPr sz="1500" b="0" i="0">
-                <a:solidFill>
-                  <a:srgbClr val="6D8470"/>
-                </a:solidFill>
-                <a:latin typeface="Arimo"/>
-              </a:rPr>
-              <a:t>Клиническое применение регуляторных и противоотечных пептидов</a:t>
-            </a:r>
-          </a:p>
-        </p:txBody>
-      </p:sp>
-      <p:sp>
-        <p:nvSpPr>
-          <p:cNvPr id="6" name="Rounded Rectangle 5"/>
+              <a:t>Источники: fact_0052, fact_0057, fact_0058, SRC-A045, SRC-A050, SRC-A051</a:t>
+            </a:r>
+          </a:p>
+        </p:txBody>
+      </p:sp>
+      <p:sp>
+        <p:nvSpPr>
+          <p:cNvPr id="4" name="Rectangle 3"/>
           <p:cNvSpPr/>
           <p:nvPr/>
         </p:nvSpPr>
         <p:spPr>
           <a:xfrm>
-            <a:off x="357187" y="1339453"/>
-            <a:ext cx="2624328" cy="2834640"/>
-          </a:xfrm>
-          <a:prstGeom prst="roundRect">
+            <a:off x="357187" y="4732734"/>
+            <a:ext cx="8429625" cy="8929"/>
+          </a:xfrm>
+          <a:prstGeom prst="rect">
             <a:avLst/>
           </a:prstGeom>
           <a:solidFill>
-            <a:srgbClr val="E6D2CA"/>
+            <a:srgbClr val="D7E0CE"/>
           </a:solidFill>
-          <a:ln w="12700">
-            <a:solidFill>
-              <a:srgbClr val="D7E0CE"/>
-            </a:solidFill>
+          <a:ln>
+            <a:noFill/>
           </a:ln>
         </p:spPr>
         <p:style>
@@ -5352,16 +5912,40 @@
           </a:p>
         </p:txBody>
       </p:sp>
-      <p:sp>
-        <p:nvSpPr>
-          <p:cNvPr id="7" name="TextBox 6"/>
+      <p:pic>
+        <p:nvPicPr>
+          <p:cNvPr id="5" name="Picture 4" descr="mark_6D8470.png"/>
+          <p:cNvPicPr>
+            <a:picLocks noChangeAspect="1"/>
+          </p:cNvPicPr>
+          <p:nvPr/>
+        </p:nvPicPr>
+        <p:blipFill>
+          <a:blip r:embed="rId2"/>
+          <a:stretch>
+            <a:fillRect/>
+          </a:stretch>
+        </p:blipFill>
+        <p:spPr>
+          <a:xfrm>
+            <a:off x="357187" y="4848820"/>
+            <a:ext cx="178593" cy="178593"/>
+          </a:xfrm>
+          <a:prstGeom prst="rect">
+            <a:avLst/>
+          </a:prstGeom>
+        </p:spPr>
+      </p:pic>
+      <p:sp>
+        <p:nvSpPr>
+          <p:cNvPr id="6" name="TextBox 5"/>
           <p:cNvSpPr txBox="1"/>
           <p:nvPr/>
         </p:nvSpPr>
         <p:spPr>
           <a:xfrm>
-            <a:off x="540067" y="1518046"/>
-            <a:ext cx="2258568" cy="457200"/>
+            <a:off x="607218" y="4830960"/>
+            <a:ext cx="1785937" cy="178593"/>
           </a:xfrm>
           <a:prstGeom prst="rect">
             <a:avLst/>
@@ -5378,35 +5962,35 @@
               <a:lnSpc>
                 <a:spcPct val="120000"/>
               </a:lnSpc>
-              <a:defRPr sz="1800" b="1" i="0">
-                <a:solidFill>
-                  <a:srgbClr val="2C3440"/>
-                </a:solidFill>
-                <a:latin typeface="Arimo"/>
-              </a:defRPr>
-            </a:pPr>
-            <a:r>
-              <a:rPr sz="1800" b="1" i="0">
-                <a:solidFill>
-                  <a:srgbClr val="2C3440"/>
+              <a:defRPr sz="1100" b="1" i="0">
+                <a:solidFill>
+                  <a:srgbClr val="3D4A40"/>
+                </a:solidFill>
+                <a:latin typeface="Arimo"/>
+              </a:defRPr>
+            </a:pPr>
+            <a:r>
+              <a:rPr sz="1100" b="1" i="0">
+                <a:solidFill>
+                  <a:srgbClr val="3D4A40"/>
                 </a:solidFill>
                 <a:latin typeface="Arimo"/>
               </a:rPr>
-              <a:t>Palmitoyl Tripeptide-1</a:t>
-            </a:r>
-          </a:p>
-        </p:txBody>
-      </p:sp>
-      <p:sp>
-        <p:nvSpPr>
-          <p:cNvPr id="8" name="TextBox 7"/>
+              <a:t>YM PROSKIN</a:t>
+            </a:r>
+          </a:p>
+        </p:txBody>
+      </p:sp>
+      <p:sp>
+        <p:nvSpPr>
+          <p:cNvPr id="7" name="TextBox 6"/>
           <p:cNvSpPr txBox="1"/>
           <p:nvPr/>
         </p:nvSpPr>
         <p:spPr>
           <a:xfrm>
-            <a:off x="540067" y="2053828"/>
-            <a:ext cx="2258568" cy="1920240"/>
+            <a:off x="8251031" y="4830960"/>
+            <a:ext cx="535781" cy="178593"/>
           </a:xfrm>
           <a:prstGeom prst="rect">
             <a:avLst/>
@@ -5419,38 +6003,128 @@
           </a:bodyPr>
           <a:lstStyle/>
           <a:p>
+            <a:pPr algn="r">
+              <a:lnSpc>
+                <a:spcPct val="120000"/>
+              </a:lnSpc>
+              <a:defRPr sz="1100" b="0" i="0">
+                <a:solidFill>
+                  <a:srgbClr val="6D8470"/>
+                </a:solidFill>
+                <a:latin typeface="Arimo"/>
+              </a:defRPr>
+            </a:pPr>
+            <a:r>
+              <a:rPr sz="1100" b="0" i="0">
+                <a:solidFill>
+                  <a:srgbClr val="6D8470"/>
+                </a:solidFill>
+                <a:latin typeface="Arimo"/>
+              </a:rPr>
+              <a:t>6</a:t>
+            </a:r>
+          </a:p>
+        </p:txBody>
+      </p:sp>
+      <p:sp>
+        <p:nvSpPr>
+          <p:cNvPr id="8" name="TextBox 7"/>
+          <p:cNvSpPr txBox="1"/>
+          <p:nvPr/>
+        </p:nvSpPr>
+        <p:spPr>
+          <a:xfrm>
+            <a:off x="357187" y="357187"/>
+            <a:ext cx="8429625" cy="401835"/>
+          </a:xfrm>
+          <a:prstGeom prst="rect">
+            <a:avLst/>
+          </a:prstGeom>
+          <a:noFill/>
+        </p:spPr>
+        <p:txBody>
+          <a:bodyPr wrap="square" tIns="0" bIns="0" lIns="0" rIns="0">
+            <a:spAutoFit/>
+          </a:bodyPr>
+          <a:lstStyle/>
+          <a:p>
             <a:pPr algn="l">
               <a:lnSpc>
                 <a:spcPct val="120000"/>
               </a:lnSpc>
-              <a:defRPr sz="1300" b="0" i="0">
-                <a:solidFill>
-                  <a:srgbClr val="3D4A40"/>
-                </a:solidFill>
-                <a:latin typeface="Arimo"/>
-              </a:defRPr>
-            </a:pPr>
-            <a:r>
-              <a:rPr sz="1300" b="0" i="0">
-                <a:solidFill>
-                  <a:srgbClr val="3D4A40"/>
+              <a:defRPr sz="2600" b="1" i="0">
+                <a:solidFill>
+                  <a:srgbClr val="2C3440"/>
+                </a:solidFill>
+                <a:latin typeface="Arimo"/>
+              </a:defRPr>
+            </a:pPr>
+            <a:r>
+              <a:rPr sz="2600" b="1" i="0">
+                <a:solidFill>
+                  <a:srgbClr val="2C3440"/>
                 </a:solidFill>
                 <a:latin typeface="Arimo"/>
               </a:rPr>
-              <a:t>Активирует синтез коллагена и гликозаминогликанов фибробластами в процессах восстановления структуры дермального слоя.</a:t>
-            </a:r>
-          </a:p>
-        </p:txBody>
-      </p:sp>
-      <p:sp>
-        <p:nvSpPr>
-          <p:cNvPr id="9" name="Rounded Rectangle 8"/>
+              <a:t>Специализированные пептиды</a:t>
+            </a:r>
+          </a:p>
+        </p:txBody>
+      </p:sp>
+      <p:sp>
+        <p:nvSpPr>
+          <p:cNvPr id="9" name="TextBox 8"/>
+          <p:cNvSpPr txBox="1"/>
+          <p:nvPr/>
+        </p:nvSpPr>
+        <p:spPr>
+          <a:xfrm>
+            <a:off x="357187" y="803671"/>
+            <a:ext cx="8429625" cy="267890"/>
+          </a:xfrm>
+          <a:prstGeom prst="rect">
+            <a:avLst/>
+          </a:prstGeom>
+          <a:noFill/>
+        </p:spPr>
+        <p:txBody>
+          <a:bodyPr wrap="square" tIns="0" bIns="0" lIns="0" rIns="0">
+            <a:spAutoFit/>
+          </a:bodyPr>
+          <a:lstStyle/>
+          <a:p>
+            <a:pPr algn="l">
+              <a:lnSpc>
+                <a:spcPct val="120000"/>
+              </a:lnSpc>
+              <a:defRPr sz="1500" b="0" i="0">
+                <a:solidFill>
+                  <a:srgbClr val="6D8470"/>
+                </a:solidFill>
+                <a:latin typeface="Arimo"/>
+              </a:defRPr>
+            </a:pPr>
+            <a:r>
+              <a:rPr sz="1500" b="0" i="0">
+                <a:solidFill>
+                  <a:srgbClr val="6D8470"/>
+                </a:solidFill>
+                <a:latin typeface="Arimo"/>
+              </a:rPr>
+              <a:t>Клиническое применение регуляторных и противоотечных пептидов</a:t>
+            </a:r>
+          </a:p>
+        </p:txBody>
+      </p:sp>
+      <p:sp>
+        <p:nvSpPr>
+          <p:cNvPr id="10" name="Rounded Rectangle 9"/>
           <p:cNvSpPr/>
           <p:nvPr/>
         </p:nvSpPr>
         <p:spPr>
           <a:xfrm>
-            <a:off x="3259335" y="1339453"/>
+            <a:off x="357187" y="1339453"/>
             <a:ext cx="2624328" cy="2834640"/>
           </a:xfrm>
           <a:prstGeom prst="roundRect">
@@ -5489,13 +6163,13 @@
       </p:sp>
       <p:sp>
         <p:nvSpPr>
-          <p:cNvPr id="10" name="TextBox 9"/>
+          <p:cNvPr id="11" name="TextBox 10"/>
           <p:cNvSpPr txBox="1"/>
           <p:nvPr/>
         </p:nvSpPr>
         <p:spPr>
           <a:xfrm>
-            <a:off x="3442215" y="1518046"/>
+            <a:off x="540067" y="1518046"/>
             <a:ext cx="2258568" cy="457200"/>
           </a:xfrm>
           <a:prstGeom prst="rect">
@@ -5527,20 +6201,20 @@
                 </a:solidFill>
                 <a:latin typeface="Arimo"/>
               </a:rPr>
-              <a:t>Palmitoyl Tripeptide-38</a:t>
-            </a:r>
-          </a:p>
-        </p:txBody>
-      </p:sp>
-      <p:sp>
-        <p:nvSpPr>
-          <p:cNvPr id="11" name="TextBox 10"/>
+              <a:t>Copper Tripeptide-1</a:t>
+            </a:r>
+          </a:p>
+        </p:txBody>
+      </p:sp>
+      <p:sp>
+        <p:nvSpPr>
+          <p:cNvPr id="12" name="TextBox 11"/>
           <p:cNvSpPr txBox="1"/>
           <p:nvPr/>
         </p:nvSpPr>
         <p:spPr>
           <a:xfrm>
-            <a:off x="3442215" y="2053828"/>
+            <a:off x="540067" y="2053828"/>
             <a:ext cx="2258568" cy="1920240"/>
           </a:xfrm>
           <a:prstGeom prst="rect">
@@ -5572,20 +6246,20 @@
                 </a:solidFill>
                 <a:latin typeface="Arimo"/>
               </a:rPr>
-              <a:t>Улучшает изотропию дермы, разглаживает микрорельеф кожи и сокращает площадь морщин в клинических исследованиях.</a:t>
-            </a:r>
-          </a:p>
-        </p:txBody>
-      </p:sp>
-      <p:sp>
-        <p:nvSpPr>
-          <p:cNvPr id="12" name="Rounded Rectangle 11"/>
+              <a:t>Стимулирует синтез коллагена и гликозаминогликанов фибробластами при ремоделировании и восстановлении дермального слоя.</a:t>
+            </a:r>
+          </a:p>
+        </p:txBody>
+      </p:sp>
+      <p:sp>
+        <p:nvSpPr>
+          <p:cNvPr id="13" name="Rounded Rectangle 12"/>
           <p:cNvSpPr/>
           <p:nvPr/>
         </p:nvSpPr>
         <p:spPr>
           <a:xfrm>
-            <a:off x="6161484" y="1339453"/>
+            <a:off x="3259335" y="1339453"/>
             <a:ext cx="2624328" cy="2834640"/>
           </a:xfrm>
           <a:prstGeom prst="roundRect">
@@ -5624,13 +6298,13 @@
       </p:sp>
       <p:sp>
         <p:nvSpPr>
-          <p:cNvPr id="13" name="TextBox 12"/>
+          <p:cNvPr id="14" name="TextBox 13"/>
           <p:cNvSpPr txBox="1"/>
           <p:nvPr/>
         </p:nvSpPr>
         <p:spPr>
           <a:xfrm>
-            <a:off x="6344364" y="1518046"/>
+            <a:off x="3442215" y="1518046"/>
             <a:ext cx="2258568" cy="457200"/>
           </a:xfrm>
           <a:prstGeom prst="rect">
@@ -5662,6 +6336,141 @@
                 </a:solidFill>
                 <a:latin typeface="Arimo"/>
               </a:rPr>
+              <a:t>Palmitoyl Tripeptide-38</a:t>
+            </a:r>
+          </a:p>
+        </p:txBody>
+      </p:sp>
+      <p:sp>
+        <p:nvSpPr>
+          <p:cNvPr id="15" name="TextBox 14"/>
+          <p:cNvSpPr txBox="1"/>
+          <p:nvPr/>
+        </p:nvSpPr>
+        <p:spPr>
+          <a:xfrm>
+            <a:off x="3442215" y="2053828"/>
+            <a:ext cx="2258568" cy="1920240"/>
+          </a:xfrm>
+          <a:prstGeom prst="rect">
+            <a:avLst/>
+          </a:prstGeom>
+          <a:noFill/>
+        </p:spPr>
+        <p:txBody>
+          <a:bodyPr wrap="square" tIns="0" bIns="0" lIns="0" rIns="0">
+            <a:spAutoFit/>
+          </a:bodyPr>
+          <a:lstStyle/>
+          <a:p>
+            <a:pPr algn="l">
+              <a:lnSpc>
+                <a:spcPct val="120000"/>
+              </a:lnSpc>
+              <a:defRPr sz="1300" b="0" i="0">
+                <a:solidFill>
+                  <a:srgbClr val="3D4A40"/>
+                </a:solidFill>
+                <a:latin typeface="Arimo"/>
+              </a:defRPr>
+            </a:pPr>
+            <a:r>
+              <a:rPr sz="1300" b="0" i="0">
+                <a:solidFill>
+                  <a:srgbClr val="3D4A40"/>
+                </a:solidFill>
+                <a:latin typeface="Arimo"/>
+              </a:rPr>
+              <a:t>Улучшает изотропию дермы, разглаживает микрорельеф кожи и сокращает площадь морщин в клинических исследованиях.</a:t>
+            </a:r>
+          </a:p>
+        </p:txBody>
+      </p:sp>
+      <p:sp>
+        <p:nvSpPr>
+          <p:cNvPr id="16" name="Rounded Rectangle 15"/>
+          <p:cNvSpPr/>
+          <p:nvPr/>
+        </p:nvSpPr>
+        <p:spPr>
+          <a:xfrm>
+            <a:off x="6161484" y="1339453"/>
+            <a:ext cx="2624328" cy="2834640"/>
+          </a:xfrm>
+          <a:prstGeom prst="roundRect">
+            <a:avLst/>
+          </a:prstGeom>
+          <a:solidFill>
+            <a:srgbClr val="E6D2CA"/>
+          </a:solidFill>
+          <a:ln w="12700">
+            <a:solidFill>
+              <a:srgbClr val="D7E0CE"/>
+            </a:solidFill>
+          </a:ln>
+        </p:spPr>
+        <p:style>
+          <a:lnRef idx="1">
+            <a:schemeClr val="accent1"/>
+          </a:lnRef>
+          <a:fillRef idx="3">
+            <a:schemeClr val="accent1"/>
+          </a:fillRef>
+          <a:effectRef idx="2">
+            <a:schemeClr val="accent1"/>
+          </a:effectRef>
+          <a:fontRef idx="minor">
+            <a:schemeClr val="lt1"/>
+          </a:fontRef>
+        </p:style>
+        <p:txBody>
+          <a:bodyPr rtlCol="0" anchor="ctr"/>
+          <a:lstStyle/>
+          <a:p>
+            <a:pPr algn="ctr"/>
+          </a:p>
+        </p:txBody>
+      </p:sp>
+      <p:sp>
+        <p:nvSpPr>
+          <p:cNvPr id="17" name="TextBox 16"/>
+          <p:cNvSpPr txBox="1"/>
+          <p:nvPr/>
+        </p:nvSpPr>
+        <p:spPr>
+          <a:xfrm>
+            <a:off x="6344364" y="1518046"/>
+            <a:ext cx="2258568" cy="457200"/>
+          </a:xfrm>
+          <a:prstGeom prst="rect">
+            <a:avLst/>
+          </a:prstGeom>
+          <a:noFill/>
+        </p:spPr>
+        <p:txBody>
+          <a:bodyPr wrap="square" tIns="0" bIns="0" lIns="0" rIns="0">
+            <a:spAutoFit/>
+          </a:bodyPr>
+          <a:lstStyle/>
+          <a:p>
+            <a:pPr algn="l">
+              <a:lnSpc>
+                <a:spcPct val="120000"/>
+              </a:lnSpc>
+              <a:defRPr sz="1800" b="1" i="0">
+                <a:solidFill>
+                  <a:srgbClr val="2C3440"/>
+                </a:solidFill>
+                <a:latin typeface="Arimo"/>
+              </a:defRPr>
+            </a:pPr>
+            <a:r>
+              <a:rPr sz="1800" b="1" i="0">
+                <a:solidFill>
+                  <a:srgbClr val="2C3440"/>
+                </a:solidFill>
+                <a:latin typeface="Arimo"/>
+              </a:rPr>
               <a:t>Acetyl Tetrapeptide-5</a:t>
             </a:r>
           </a:p>
@@ -5669,7 +6478,7 @@
       </p:sp>
       <p:sp>
         <p:nvSpPr>
-          <p:cNvPr id="14" name="TextBox 13"/>
+          <p:cNvPr id="18" name="TextBox 17"/>
           <p:cNvSpPr txBox="1"/>
           <p:nvPr/>
         </p:nvSpPr>
@@ -5746,7 +6555,7 @@
         </p:nvSpPr>
         <p:spPr>
           <a:xfrm>
-            <a:off x="357187" y="4643437"/>
+            <a:off x="357187" y="4464843"/>
             <a:ext cx="4572000" cy="274320"/>
           </a:xfrm>
           <a:prstGeom prst="rect">
@@ -5791,7 +6600,7 @@
         </p:nvSpPr>
         <p:spPr>
           <a:xfrm>
-            <a:off x="5029200" y="4643437"/>
+            <a:off x="5029200" y="4464843"/>
             <a:ext cx="3749039" cy="274320"/>
           </a:xfrm>
           <a:prstGeom prst="rect">
@@ -5830,115 +6639,23 @@
       </p:sp>
       <p:sp>
         <p:nvSpPr>
-          <p:cNvPr id="4" name="TextBox 3"/>
-          <p:cNvSpPr txBox="1"/>
-          <p:nvPr/>
-        </p:nvSpPr>
-        <p:spPr>
-          <a:xfrm>
-            <a:off x="357187" y="357187"/>
-            <a:ext cx="8429625" cy="401835"/>
-          </a:xfrm>
-          <a:prstGeom prst="rect">
-            <a:avLst/>
-          </a:prstGeom>
-          <a:noFill/>
-        </p:spPr>
-        <p:txBody>
-          <a:bodyPr wrap="square" tIns="0" bIns="0" lIns="0" rIns="0">
-            <a:spAutoFit/>
-          </a:bodyPr>
-          <a:lstStyle/>
-          <a:p>
-            <a:pPr algn="l">
-              <a:lnSpc>
-                <a:spcPct val="120000"/>
-              </a:lnSpc>
-              <a:defRPr sz="2600" b="1" i="0">
-                <a:solidFill>
-                  <a:srgbClr val="2C3440"/>
-                </a:solidFill>
-                <a:latin typeface="Arimo"/>
-              </a:defRPr>
-            </a:pPr>
-            <a:r>
-              <a:rPr sz="2600" b="1" i="0">
-                <a:solidFill>
-                  <a:srgbClr val="2C3440"/>
-                </a:solidFill>
-                <a:latin typeface="Arimo"/>
-              </a:rPr>
-              <a:t>Клиническая безопасность и переносимость</a:t>
-            </a:r>
-          </a:p>
-        </p:txBody>
-      </p:sp>
-      <p:sp>
-        <p:nvSpPr>
-          <p:cNvPr id="5" name="TextBox 4"/>
-          <p:cNvSpPr txBox="1"/>
-          <p:nvPr/>
-        </p:nvSpPr>
-        <p:spPr>
-          <a:xfrm>
-            <a:off x="357187" y="803671"/>
-            <a:ext cx="8429625" cy="267890"/>
-          </a:xfrm>
-          <a:prstGeom prst="rect">
-            <a:avLst/>
-          </a:prstGeom>
-          <a:noFill/>
-        </p:spPr>
-        <p:txBody>
-          <a:bodyPr wrap="square" tIns="0" bIns="0" lIns="0" rIns="0">
-            <a:spAutoFit/>
-          </a:bodyPr>
-          <a:lstStyle/>
-          <a:p>
-            <a:pPr algn="l">
-              <a:lnSpc>
-                <a:spcPct val="120000"/>
-              </a:lnSpc>
-              <a:defRPr sz="1500" b="0" i="0">
-                <a:solidFill>
-                  <a:srgbClr val="6D8470"/>
-                </a:solidFill>
-                <a:latin typeface="Arimo"/>
-              </a:defRPr>
-            </a:pPr>
-            <a:r>
-              <a:rPr sz="1500" b="0" i="0">
-                <a:solidFill>
-                  <a:srgbClr val="6D8470"/>
-                </a:solidFill>
-                <a:latin typeface="Arimo"/>
-              </a:rPr>
-              <a:t>Профиль безопасности биомиметических пептидов в косметических формулах</a:t>
-            </a:r>
-          </a:p>
-        </p:txBody>
-      </p:sp>
-      <p:sp>
-        <p:nvSpPr>
-          <p:cNvPr id="6" name="Rounded Rectangle 5"/>
+          <p:cNvPr id="4" name="Rectangle 3"/>
           <p:cNvSpPr/>
           <p:nvPr/>
         </p:nvSpPr>
         <p:spPr>
           <a:xfrm>
-            <a:off x="357187" y="1339453"/>
-            <a:ext cx="8430768" cy="2496312"/>
-          </a:xfrm>
-          <a:prstGeom prst="roundRect">
+            <a:off x="357187" y="4732734"/>
+            <a:ext cx="8429625" cy="8929"/>
+          </a:xfrm>
+          <a:prstGeom prst="rect">
             <a:avLst/>
           </a:prstGeom>
           <a:solidFill>
-            <a:srgbClr val="E6D2CA"/>
+            <a:srgbClr val="D7E0CE"/>
           </a:solidFill>
-          <a:ln w="25400">
-            <a:solidFill>
-              <a:srgbClr val="9E6A5A"/>
-            </a:solidFill>
+          <a:ln>
+            <a:noFill/>
           </a:ln>
         </p:spPr>
         <p:style>
@@ -5963,16 +6680,40 @@
           </a:p>
         </p:txBody>
       </p:sp>
-      <p:sp>
-        <p:nvSpPr>
-          <p:cNvPr id="7" name="TextBox 6"/>
+      <p:pic>
+        <p:nvPicPr>
+          <p:cNvPr id="5" name="Picture 4" descr="mark_6D8470.png"/>
+          <p:cNvPicPr>
+            <a:picLocks noChangeAspect="1"/>
+          </p:cNvPicPr>
+          <p:nvPr/>
+        </p:nvPicPr>
+        <p:blipFill>
+          <a:blip r:embed="rId2"/>
+          <a:stretch>
+            <a:fillRect/>
+          </a:stretch>
+        </p:blipFill>
+        <p:spPr>
+          <a:xfrm>
+            <a:off x="357187" y="4848820"/>
+            <a:ext cx="178593" cy="178593"/>
+          </a:xfrm>
+          <a:prstGeom prst="rect">
+            <a:avLst/>
+          </a:prstGeom>
+        </p:spPr>
+      </p:pic>
+      <p:sp>
+        <p:nvSpPr>
+          <p:cNvPr id="6" name="TextBox 5"/>
           <p:cNvSpPr txBox="1"/>
           <p:nvPr/>
         </p:nvSpPr>
         <p:spPr>
           <a:xfrm>
-            <a:off x="640080" y="2009179"/>
-            <a:ext cx="731520" cy="731520"/>
+            <a:off x="607218" y="4830960"/>
+            <a:ext cx="1785937" cy="178593"/>
           </a:xfrm>
           <a:prstGeom prst="rect">
             <a:avLst/>
@@ -5985,39 +6726,39 @@
           </a:bodyPr>
           <a:lstStyle/>
           <a:p>
-            <a:pPr algn="ctr">
-              <a:lnSpc>
-                <a:spcPct val="120000"/>
-              </a:lnSpc>
-              <a:defRPr sz="4800" b="0" i="0">
-                <a:solidFill>
-                  <a:srgbClr val="9E6A5A"/>
-                </a:solidFill>
-                <a:latin typeface="Arimo"/>
-              </a:defRPr>
-            </a:pPr>
-            <a:r>
-              <a:rPr sz="4800" b="0" i="0">
-                <a:solidFill>
-                  <a:srgbClr val="9E6A5A"/>
+            <a:pPr algn="l">
+              <a:lnSpc>
+                <a:spcPct val="120000"/>
+              </a:lnSpc>
+              <a:defRPr sz="1100" b="1" i="0">
+                <a:solidFill>
+                  <a:srgbClr val="3D4A40"/>
+                </a:solidFill>
+                <a:latin typeface="Arimo"/>
+              </a:defRPr>
+            </a:pPr>
+            <a:r>
+              <a:rPr sz="1100" b="1" i="0">
+                <a:solidFill>
+                  <a:srgbClr val="3D4A40"/>
                 </a:solidFill>
                 <a:latin typeface="Arimo"/>
               </a:rPr>
-              <a:t>⚠️</a:t>
-            </a:r>
-          </a:p>
-        </p:txBody>
-      </p:sp>
-      <p:sp>
-        <p:nvSpPr>
-          <p:cNvPr id="8" name="TextBox 7"/>
+              <a:t>YM PROSKIN</a:t>
+            </a:r>
+          </a:p>
+        </p:txBody>
+      </p:sp>
+      <p:sp>
+        <p:nvSpPr>
+          <p:cNvPr id="7" name="TextBox 6"/>
           <p:cNvSpPr txBox="1"/>
           <p:nvPr/>
         </p:nvSpPr>
         <p:spPr>
           <a:xfrm>
-            <a:off x="1517904" y="1607343"/>
-            <a:ext cx="6858000" cy="365760"/>
+            <a:off x="8251031" y="4830960"/>
+            <a:ext cx="535781" cy="178593"/>
           </a:xfrm>
           <a:prstGeom prst="rect">
             <a:avLst/>
@@ -6030,6 +6771,231 @@
           </a:bodyPr>
           <a:lstStyle/>
           <a:p>
+            <a:pPr algn="r">
+              <a:lnSpc>
+                <a:spcPct val="120000"/>
+              </a:lnSpc>
+              <a:defRPr sz="1100" b="0" i="0">
+                <a:solidFill>
+                  <a:srgbClr val="6D8470"/>
+                </a:solidFill>
+                <a:latin typeface="Arimo"/>
+              </a:defRPr>
+            </a:pPr>
+            <a:r>
+              <a:rPr sz="1100" b="0" i="0">
+                <a:solidFill>
+                  <a:srgbClr val="6D8470"/>
+                </a:solidFill>
+                <a:latin typeface="Arimo"/>
+              </a:rPr>
+              <a:t>7</a:t>
+            </a:r>
+          </a:p>
+        </p:txBody>
+      </p:sp>
+      <p:sp>
+        <p:nvSpPr>
+          <p:cNvPr id="8" name="TextBox 7"/>
+          <p:cNvSpPr txBox="1"/>
+          <p:nvPr/>
+        </p:nvSpPr>
+        <p:spPr>
+          <a:xfrm>
+            <a:off x="357187" y="357187"/>
+            <a:ext cx="8429625" cy="401835"/>
+          </a:xfrm>
+          <a:prstGeom prst="rect">
+            <a:avLst/>
+          </a:prstGeom>
+          <a:noFill/>
+        </p:spPr>
+        <p:txBody>
+          <a:bodyPr wrap="square" tIns="0" bIns="0" lIns="0" rIns="0">
+            <a:spAutoFit/>
+          </a:bodyPr>
+          <a:lstStyle/>
+          <a:p>
+            <a:pPr algn="l">
+              <a:lnSpc>
+                <a:spcPct val="120000"/>
+              </a:lnSpc>
+              <a:defRPr sz="2600" b="1" i="0">
+                <a:solidFill>
+                  <a:srgbClr val="2C3440"/>
+                </a:solidFill>
+                <a:latin typeface="Arimo"/>
+              </a:defRPr>
+            </a:pPr>
+            <a:r>
+              <a:rPr sz="2600" b="1" i="0">
+                <a:solidFill>
+                  <a:srgbClr val="2C3440"/>
+                </a:solidFill>
+                <a:latin typeface="Arimo"/>
+              </a:rPr>
+              <a:t>Клиническая безопасность и переносимость</a:t>
+            </a:r>
+          </a:p>
+        </p:txBody>
+      </p:sp>
+      <p:sp>
+        <p:nvSpPr>
+          <p:cNvPr id="9" name="TextBox 8"/>
+          <p:cNvSpPr txBox="1"/>
+          <p:nvPr/>
+        </p:nvSpPr>
+        <p:spPr>
+          <a:xfrm>
+            <a:off x="357187" y="803671"/>
+            <a:ext cx="8429625" cy="267890"/>
+          </a:xfrm>
+          <a:prstGeom prst="rect">
+            <a:avLst/>
+          </a:prstGeom>
+          <a:noFill/>
+        </p:spPr>
+        <p:txBody>
+          <a:bodyPr wrap="square" tIns="0" bIns="0" lIns="0" rIns="0">
+            <a:spAutoFit/>
+          </a:bodyPr>
+          <a:lstStyle/>
+          <a:p>
+            <a:pPr algn="l">
+              <a:lnSpc>
+                <a:spcPct val="120000"/>
+              </a:lnSpc>
+              <a:defRPr sz="1500" b="0" i="0">
+                <a:solidFill>
+                  <a:srgbClr val="6D8470"/>
+                </a:solidFill>
+                <a:latin typeface="Arimo"/>
+              </a:defRPr>
+            </a:pPr>
+            <a:r>
+              <a:rPr sz="1500" b="0" i="0">
+                <a:solidFill>
+                  <a:srgbClr val="6D8470"/>
+                </a:solidFill>
+                <a:latin typeface="Arimo"/>
+              </a:rPr>
+              <a:t>Профиль безопасности биомиметических пептидов в косметических формулах</a:t>
+            </a:r>
+          </a:p>
+        </p:txBody>
+      </p:sp>
+      <p:sp>
+        <p:nvSpPr>
+          <p:cNvPr id="10" name="Rounded Rectangle 9"/>
+          <p:cNvSpPr/>
+          <p:nvPr/>
+        </p:nvSpPr>
+        <p:spPr>
+          <a:xfrm>
+            <a:off x="357187" y="1339453"/>
+            <a:ext cx="8430768" cy="2496312"/>
+          </a:xfrm>
+          <a:prstGeom prst="roundRect">
+            <a:avLst/>
+          </a:prstGeom>
+          <a:solidFill>
+            <a:srgbClr val="E6D2CA"/>
+          </a:solidFill>
+          <a:ln w="25400">
+            <a:solidFill>
+              <a:srgbClr val="9E6A5A"/>
+            </a:solidFill>
+          </a:ln>
+        </p:spPr>
+        <p:style>
+          <a:lnRef idx="1">
+            <a:schemeClr val="accent1"/>
+          </a:lnRef>
+          <a:fillRef idx="3">
+            <a:schemeClr val="accent1"/>
+          </a:fillRef>
+          <a:effectRef idx="2">
+            <a:schemeClr val="accent1"/>
+          </a:effectRef>
+          <a:fontRef idx="minor">
+            <a:schemeClr val="lt1"/>
+          </a:fontRef>
+        </p:style>
+        <p:txBody>
+          <a:bodyPr rtlCol="0" anchor="ctr"/>
+          <a:lstStyle/>
+          <a:p>
+            <a:pPr algn="ctr"/>
+          </a:p>
+        </p:txBody>
+      </p:sp>
+      <p:sp>
+        <p:nvSpPr>
+          <p:cNvPr id="11" name="TextBox 10"/>
+          <p:cNvSpPr txBox="1"/>
+          <p:nvPr/>
+        </p:nvSpPr>
+        <p:spPr>
+          <a:xfrm>
+            <a:off x="640080" y="2009179"/>
+            <a:ext cx="731520" cy="731520"/>
+          </a:xfrm>
+          <a:prstGeom prst="rect">
+            <a:avLst/>
+          </a:prstGeom>
+          <a:noFill/>
+        </p:spPr>
+        <p:txBody>
+          <a:bodyPr wrap="square" tIns="0" bIns="0" lIns="0" rIns="0">
+            <a:spAutoFit/>
+          </a:bodyPr>
+          <a:lstStyle/>
+          <a:p>
+            <a:pPr algn="ctr">
+              <a:lnSpc>
+                <a:spcPct val="120000"/>
+              </a:lnSpc>
+              <a:defRPr sz="4800" b="0" i="0">
+                <a:solidFill>
+                  <a:srgbClr val="9E6A5A"/>
+                </a:solidFill>
+                <a:latin typeface="Arimo"/>
+              </a:defRPr>
+            </a:pPr>
+            <a:r>
+              <a:rPr sz="4800" b="0" i="0">
+                <a:solidFill>
+                  <a:srgbClr val="9E6A5A"/>
+                </a:solidFill>
+                <a:latin typeface="Arimo"/>
+              </a:rPr>
+              <a:t>⚠️</a:t>
+            </a:r>
+          </a:p>
+        </p:txBody>
+      </p:sp>
+      <p:sp>
+        <p:nvSpPr>
+          <p:cNvPr id="12" name="TextBox 11"/>
+          <p:cNvSpPr txBox="1"/>
+          <p:nvPr/>
+        </p:nvSpPr>
+        <p:spPr>
+          <a:xfrm>
+            <a:off x="1517904" y="1607343"/>
+            <a:ext cx="6858000" cy="365760"/>
+          </a:xfrm>
+          <a:prstGeom prst="rect">
+            <a:avLst/>
+          </a:prstGeom>
+          <a:noFill/>
+        </p:spPr>
+        <p:txBody>
+          <a:bodyPr wrap="square" tIns="0" bIns="0" lIns="0" rIns="0">
+            <a:spAutoFit/>
+          </a:bodyPr>
+          <a:lstStyle/>
+          <a:p>
             <a:pPr algn="l">
               <a:lnSpc>
                 <a:spcPct val="120000"/>
@@ -6055,7 +7021,7 @@
       </p:sp>
       <p:sp>
         <p:nvSpPr>
-          <p:cNvPr id="9" name="TextBox 8"/>
+          <p:cNvPr id="13" name="TextBox 12"/>
           <p:cNvSpPr txBox="1"/>
           <p:nvPr/>
         </p:nvSpPr>
@@ -6132,7 +7098,7 @@
         </p:nvSpPr>
         <p:spPr>
           <a:xfrm>
-            <a:off x="357187" y="4643437"/>
+            <a:off x="357187" y="4464843"/>
             <a:ext cx="4572000" cy="274320"/>
           </a:xfrm>
           <a:prstGeom prst="rect">
@@ -6177,7 +7143,7 @@
         </p:nvSpPr>
         <p:spPr>
           <a:xfrm>
-            <a:off x="5029200" y="4643437"/>
+            <a:off x="5029200" y="4464843"/>
             <a:ext cx="3749039" cy="274320"/>
           </a:xfrm>
           <a:prstGeom prst="rect">
@@ -6216,115 +7182,23 @@
       </p:sp>
       <p:sp>
         <p:nvSpPr>
-          <p:cNvPr id="4" name="TextBox 3"/>
-          <p:cNvSpPr txBox="1"/>
-          <p:nvPr/>
-        </p:nvSpPr>
-        <p:spPr>
-          <a:xfrm>
-            <a:off x="357187" y="357187"/>
-            <a:ext cx="8429625" cy="401835"/>
-          </a:xfrm>
-          <a:prstGeom prst="rect">
-            <a:avLst/>
-          </a:prstGeom>
-          <a:noFill/>
-        </p:spPr>
-        <p:txBody>
-          <a:bodyPr wrap="square" tIns="0" bIns="0" lIns="0" rIns="0">
-            <a:spAutoFit/>
-          </a:bodyPr>
-          <a:lstStyle/>
-          <a:p>
-            <a:pPr algn="l">
-              <a:lnSpc>
-                <a:spcPct val="120000"/>
-              </a:lnSpc>
-              <a:defRPr sz="2600" b="1" i="0">
-                <a:solidFill>
-                  <a:srgbClr val="2C3440"/>
-                </a:solidFill>
-                <a:latin typeface="Arimo"/>
-              </a:defRPr>
-            </a:pPr>
-            <a:r>
-              <a:rPr sz="2600" b="1" i="0">
-                <a:solidFill>
-                  <a:srgbClr val="2C3440"/>
-                </a:solidFill>
-                <a:latin typeface="Arimo"/>
-              </a:rPr>
-              <a:t>Терапевтические выводы</a:t>
-            </a:r>
-          </a:p>
-        </p:txBody>
-      </p:sp>
-      <p:sp>
-        <p:nvSpPr>
-          <p:cNvPr id="5" name="TextBox 4"/>
-          <p:cNvSpPr txBox="1"/>
-          <p:nvPr/>
-        </p:nvSpPr>
-        <p:spPr>
-          <a:xfrm>
-            <a:off x="357187" y="803671"/>
-            <a:ext cx="8429625" cy="267890"/>
-          </a:xfrm>
-          <a:prstGeom prst="rect">
-            <a:avLst/>
-          </a:prstGeom>
-          <a:noFill/>
-        </p:spPr>
-        <p:txBody>
-          <a:bodyPr wrap="square" tIns="0" bIns="0" lIns="0" rIns="0">
-            <a:spAutoFit/>
-          </a:bodyPr>
-          <a:lstStyle/>
-          <a:p>
-            <a:pPr algn="l">
-              <a:lnSpc>
-                <a:spcPct val="120000"/>
-              </a:lnSpc>
-              <a:defRPr sz="1500" b="0" i="0">
-                <a:solidFill>
-                  <a:srgbClr val="6D8470"/>
-                </a:solidFill>
-                <a:latin typeface="Arimo"/>
-              </a:defRPr>
-            </a:pPr>
-            <a:r>
-              <a:rPr sz="1500" b="0" i="0">
-                <a:solidFill>
-                  <a:srgbClr val="6D8470"/>
-                </a:solidFill>
-                <a:latin typeface="Arimo"/>
-              </a:rPr>
-              <a:t>Резюме по применению биомиметических пептидов</a:t>
-            </a:r>
-          </a:p>
-        </p:txBody>
-      </p:sp>
-      <p:sp>
-        <p:nvSpPr>
-          <p:cNvPr id="6" name="Rounded Rectangle 5"/>
+          <p:cNvPr id="4" name="Rectangle 3"/>
           <p:cNvSpPr/>
           <p:nvPr/>
         </p:nvSpPr>
         <p:spPr>
           <a:xfrm>
-            <a:off x="357187" y="1303734"/>
-            <a:ext cx="8430768" cy="2857500"/>
-          </a:xfrm>
-          <a:prstGeom prst="roundRect">
+            <a:off x="357187" y="4732734"/>
+            <a:ext cx="8429625" cy="8929"/>
+          </a:xfrm>
+          <a:prstGeom prst="rect">
             <a:avLst/>
           </a:prstGeom>
           <a:solidFill>
-            <a:srgbClr val="E6D2CA"/>
+            <a:srgbClr val="D7E0CE"/>
           </a:solidFill>
-          <a:ln w="12700">
-            <a:solidFill>
-              <a:srgbClr val="D7E0CE"/>
-            </a:solidFill>
+          <a:ln>
+            <a:noFill/>
           </a:ln>
         </p:spPr>
         <p:style>
@@ -6349,16 +7223,40 @@
           </a:p>
         </p:txBody>
       </p:sp>
-      <p:sp>
-        <p:nvSpPr>
-          <p:cNvPr id="7" name="TextBox 6"/>
+      <p:pic>
+        <p:nvPicPr>
+          <p:cNvPr id="5" name="Picture 4" descr="mark_6D8470.png"/>
+          <p:cNvPicPr>
+            <a:picLocks noChangeAspect="1"/>
+          </p:cNvPicPr>
+          <p:nvPr/>
+        </p:nvPicPr>
+        <p:blipFill>
+          <a:blip r:embed="rId2"/>
+          <a:stretch>
+            <a:fillRect/>
+          </a:stretch>
+        </p:blipFill>
+        <p:spPr>
+          <a:xfrm>
+            <a:off x="357187" y="4848820"/>
+            <a:ext cx="178593" cy="178593"/>
+          </a:xfrm>
+          <a:prstGeom prst="rect">
+            <a:avLst/>
+          </a:prstGeom>
+        </p:spPr>
+      </p:pic>
+      <p:sp>
+        <p:nvSpPr>
+          <p:cNvPr id="6" name="TextBox 5"/>
           <p:cNvSpPr txBox="1"/>
           <p:nvPr/>
         </p:nvSpPr>
         <p:spPr>
           <a:xfrm>
-            <a:off x="640080" y="1580554"/>
-            <a:ext cx="7863840" cy="2286000"/>
+            <a:off x="607218" y="4830960"/>
+            <a:ext cx="1785937" cy="178593"/>
           </a:xfrm>
           <a:prstGeom prst="rect">
             <a:avLst/>
@@ -6375,6 +7273,231 @@
               <a:lnSpc>
                 <a:spcPct val="120000"/>
               </a:lnSpc>
+              <a:defRPr sz="1100" b="1" i="0">
+                <a:solidFill>
+                  <a:srgbClr val="3D4A40"/>
+                </a:solidFill>
+                <a:latin typeface="Arimo"/>
+              </a:defRPr>
+            </a:pPr>
+            <a:r>
+              <a:rPr sz="1100" b="1" i="0">
+                <a:solidFill>
+                  <a:srgbClr val="3D4A40"/>
+                </a:solidFill>
+                <a:latin typeface="Arimo"/>
+              </a:rPr>
+              <a:t>YM PROSKIN</a:t>
+            </a:r>
+          </a:p>
+        </p:txBody>
+      </p:sp>
+      <p:sp>
+        <p:nvSpPr>
+          <p:cNvPr id="7" name="TextBox 6"/>
+          <p:cNvSpPr txBox="1"/>
+          <p:nvPr/>
+        </p:nvSpPr>
+        <p:spPr>
+          <a:xfrm>
+            <a:off x="8251031" y="4830960"/>
+            <a:ext cx="535781" cy="178593"/>
+          </a:xfrm>
+          <a:prstGeom prst="rect">
+            <a:avLst/>
+          </a:prstGeom>
+          <a:noFill/>
+        </p:spPr>
+        <p:txBody>
+          <a:bodyPr wrap="square" tIns="0" bIns="0" lIns="0" rIns="0">
+            <a:spAutoFit/>
+          </a:bodyPr>
+          <a:lstStyle/>
+          <a:p>
+            <a:pPr algn="r">
+              <a:lnSpc>
+                <a:spcPct val="120000"/>
+              </a:lnSpc>
+              <a:defRPr sz="1100" b="0" i="0">
+                <a:solidFill>
+                  <a:srgbClr val="6D8470"/>
+                </a:solidFill>
+                <a:latin typeface="Arimo"/>
+              </a:defRPr>
+            </a:pPr>
+            <a:r>
+              <a:rPr sz="1100" b="0" i="0">
+                <a:solidFill>
+                  <a:srgbClr val="6D8470"/>
+                </a:solidFill>
+                <a:latin typeface="Arimo"/>
+              </a:rPr>
+              <a:t>8</a:t>
+            </a:r>
+          </a:p>
+        </p:txBody>
+      </p:sp>
+      <p:sp>
+        <p:nvSpPr>
+          <p:cNvPr id="8" name="TextBox 7"/>
+          <p:cNvSpPr txBox="1"/>
+          <p:nvPr/>
+        </p:nvSpPr>
+        <p:spPr>
+          <a:xfrm>
+            <a:off x="357187" y="357187"/>
+            <a:ext cx="8429625" cy="401835"/>
+          </a:xfrm>
+          <a:prstGeom prst="rect">
+            <a:avLst/>
+          </a:prstGeom>
+          <a:noFill/>
+        </p:spPr>
+        <p:txBody>
+          <a:bodyPr wrap="square" tIns="0" bIns="0" lIns="0" rIns="0">
+            <a:spAutoFit/>
+          </a:bodyPr>
+          <a:lstStyle/>
+          <a:p>
+            <a:pPr algn="l">
+              <a:lnSpc>
+                <a:spcPct val="120000"/>
+              </a:lnSpc>
+              <a:defRPr sz="2600" b="1" i="0">
+                <a:solidFill>
+                  <a:srgbClr val="2C3440"/>
+                </a:solidFill>
+                <a:latin typeface="Arimo"/>
+              </a:defRPr>
+            </a:pPr>
+            <a:r>
+              <a:rPr sz="2600" b="1" i="0">
+                <a:solidFill>
+                  <a:srgbClr val="2C3440"/>
+                </a:solidFill>
+                <a:latin typeface="Arimo"/>
+              </a:rPr>
+              <a:t>Терапевтические выводы</a:t>
+            </a:r>
+          </a:p>
+        </p:txBody>
+      </p:sp>
+      <p:sp>
+        <p:nvSpPr>
+          <p:cNvPr id="9" name="TextBox 8"/>
+          <p:cNvSpPr txBox="1"/>
+          <p:nvPr/>
+        </p:nvSpPr>
+        <p:spPr>
+          <a:xfrm>
+            <a:off x="357187" y="803671"/>
+            <a:ext cx="8429625" cy="267890"/>
+          </a:xfrm>
+          <a:prstGeom prst="rect">
+            <a:avLst/>
+          </a:prstGeom>
+          <a:noFill/>
+        </p:spPr>
+        <p:txBody>
+          <a:bodyPr wrap="square" tIns="0" bIns="0" lIns="0" rIns="0">
+            <a:spAutoFit/>
+          </a:bodyPr>
+          <a:lstStyle/>
+          <a:p>
+            <a:pPr algn="l">
+              <a:lnSpc>
+                <a:spcPct val="120000"/>
+              </a:lnSpc>
+              <a:defRPr sz="1500" b="0" i="0">
+                <a:solidFill>
+                  <a:srgbClr val="6D8470"/>
+                </a:solidFill>
+                <a:latin typeface="Arimo"/>
+              </a:defRPr>
+            </a:pPr>
+            <a:r>
+              <a:rPr sz="1500" b="0" i="0">
+                <a:solidFill>
+                  <a:srgbClr val="6D8470"/>
+                </a:solidFill>
+                <a:latin typeface="Arimo"/>
+              </a:rPr>
+              <a:t>Резюме по применению биомиметических пептидов</a:t>
+            </a:r>
+          </a:p>
+        </p:txBody>
+      </p:sp>
+      <p:sp>
+        <p:nvSpPr>
+          <p:cNvPr id="10" name="Rounded Rectangle 9"/>
+          <p:cNvSpPr/>
+          <p:nvPr/>
+        </p:nvSpPr>
+        <p:spPr>
+          <a:xfrm>
+            <a:off x="357187" y="1303734"/>
+            <a:ext cx="8430768" cy="2857500"/>
+          </a:xfrm>
+          <a:prstGeom prst="roundRect">
+            <a:avLst/>
+          </a:prstGeom>
+          <a:solidFill>
+            <a:srgbClr val="E6D2CA"/>
+          </a:solidFill>
+          <a:ln w="12700">
+            <a:solidFill>
+              <a:srgbClr val="D7E0CE"/>
+            </a:solidFill>
+          </a:ln>
+        </p:spPr>
+        <p:style>
+          <a:lnRef idx="1">
+            <a:schemeClr val="accent1"/>
+          </a:lnRef>
+          <a:fillRef idx="3">
+            <a:schemeClr val="accent1"/>
+          </a:fillRef>
+          <a:effectRef idx="2">
+            <a:schemeClr val="accent1"/>
+          </a:effectRef>
+          <a:fontRef idx="minor">
+            <a:schemeClr val="lt1"/>
+          </a:fontRef>
+        </p:style>
+        <p:txBody>
+          <a:bodyPr rtlCol="0" anchor="ctr"/>
+          <a:lstStyle/>
+          <a:p>
+            <a:pPr algn="ctr"/>
+          </a:p>
+        </p:txBody>
+      </p:sp>
+      <p:sp>
+        <p:nvSpPr>
+          <p:cNvPr id="11" name="TextBox 10"/>
+          <p:cNvSpPr txBox="1"/>
+          <p:nvPr/>
+        </p:nvSpPr>
+        <p:spPr>
+          <a:xfrm>
+            <a:off x="640080" y="1580554"/>
+            <a:ext cx="7863840" cy="2286000"/>
+          </a:xfrm>
+          <a:prstGeom prst="rect">
+            <a:avLst/>
+          </a:prstGeom>
+          <a:noFill/>
+        </p:spPr>
+        <p:txBody>
+          <a:bodyPr wrap="square" tIns="0" bIns="0" lIns="0" rIns="0">
+            <a:spAutoFit/>
+          </a:bodyPr>
+          <a:lstStyle/>
+          <a:p>
+            <a:pPr algn="l">
+              <a:lnSpc>
+                <a:spcPct val="120000"/>
+              </a:lnSpc>
               <a:defRPr sz="1500" b="0" i="0">
                 <a:solidFill>
                   <a:srgbClr val="3D4A40"/>
@@ -6464,6 +7587,30 @@
           </a:p>
         </p:txBody>
       </p:sp>
+      <p:pic>
+        <p:nvPicPr>
+          <p:cNvPr id="12" name="Picture 11" descr="badge_2C3440.png"/>
+          <p:cNvPicPr>
+            <a:picLocks noChangeAspect="1"/>
+          </p:cNvPicPr>
+          <p:nvPr/>
+        </p:nvPicPr>
+        <p:blipFill>
+          <a:blip r:embed="rId3"/>
+          <a:stretch>
+            <a:fillRect/>
+          </a:stretch>
+        </p:blipFill>
+        <p:spPr>
+          <a:xfrm>
+            <a:off x="3750468" y="1750218"/>
+            <a:ext cx="1643062" cy="1643062"/>
+          </a:xfrm>
+          <a:prstGeom prst="rect">
+            <a:avLst/>
+          </a:prstGeom>
+        </p:spPr>
+      </p:pic>
     </p:spTree>
   </p:cSld>
   <p:clrMapOvr>
